--- a/tellTale_CyberForge_Deck.pptx
+++ b/tellTale_CyberForge_Deck.pptx
@@ -20,7 +20,6 @@
     <p:sldId id="268" r:id="rId14"/>
     <p:sldId id="269" r:id="rId15"/>
     <p:sldId id="270" r:id="rId16"/>
-    <p:sldId id="271" r:id="rId17"/>
     <p:sldId id="272" r:id="rId18"/>
     <p:sldId id="273" r:id="rId19"/>
   </p:sldIdLst>
@@ -1408,94 +1407,6 @@
 </p:notes>
 </file>
 
-<file path=ppt/notesSlides/notesSlide16.xml><?xml version="1.0" encoding="utf-8"?>
-<p:notes xmlns:a="http://schemas.openxmlformats.org/drawingml/2006/main" xmlns:r="http://schemas.openxmlformats.org/officeDocument/2006/relationships" xmlns:p="http://schemas.openxmlformats.org/presentationml/2006/main">
-  <p:cSld>
-    <p:spTree>
-      <p:nvGrpSpPr>
-        <p:cNvPr id="1" name=""/>
-        <p:cNvGrpSpPr/>
-        <p:nvPr/>
-      </p:nvGrpSpPr>
-      <p:grpSpPr>
-        <a:xfrm>
-          <a:off x="0" y="0"/>
-          <a:ext cx="0" cy="0"/>
-          <a:chOff x="0" y="0"/>
-          <a:chExt cx="0" cy="0"/>
-        </a:xfrm>
-      </p:grpSpPr>
-      <p:sp>
-        <p:nvSpPr>
-          <p:cNvPr id="2" name="Slide Image Placeholder 1"/>
-          <p:cNvSpPr>
-            <a:spLocks noGrp="1" noRot="1" noChangeAspect="1"/>
-          </p:cNvSpPr>
-          <p:nvPr>
-            <p:ph type="sldImg"/>
-          </p:nvPr>
-        </p:nvSpPr>
-        <p:spPr/>
-      </p:sp>
-      <p:sp>
-        <p:nvSpPr>
-          <p:cNvPr id="3" name="Notes Placeholder 2"/>
-          <p:cNvSpPr>
-            <a:spLocks noGrp="1"/>
-          </p:cNvSpPr>
-          <p:nvPr>
-            <p:ph type="body" idx="1"/>
-          </p:nvPr>
-        </p:nvSpPr>
-        <p:spPr/>
-        <p:txBody>
-          <a:bodyPr/>
-          <a:lstStyle/>
-          <a:p>
-            <a:r>
-              <a:rPr lang="en-US" dirty="0"/>
-              <a:t/>
-            </a:r>
-            <a:endParaRPr lang="en-US" dirty="0"/>
-          </a:p>
-        </p:txBody>
-      </p:sp>
-      <p:sp>
-        <p:nvSpPr>
-          <p:cNvPr id="4" name="Slide Number Placeholder 3"/>
-          <p:cNvSpPr>
-            <a:spLocks noGrp="1"/>
-          </p:cNvSpPr>
-          <p:nvPr>
-            <p:ph type="sldNum" sz="quarter" idx="10"/>
-          </p:nvPr>
-        </p:nvSpPr>
-        <p:spPr/>
-        <p:txBody>
-          <a:bodyPr/>
-          <a:lstStyle/>
-          <a:p>
-            <a:fld id="{F7021451-1387-4CA6-816F-3879F97B5CBC}" type="slidenum">
-              <a:rPr lang="en-US"/>
-              <a:t>16</a:t>
-            </a:fld>
-            <a:endParaRPr lang="en-US"/>
-          </a:p>
-        </p:txBody>
-      </p:sp>
-    </p:spTree>
-    <p:extLst>
-      <p:ext uri="{BB962C8B-B14F-4D97-AF65-F5344CB8AC3E}">
-        <p14:creationId xmlns:p14="http://schemas.microsoft.com/office/powerpoint/2010/main" val="1024086991"/>
-      </p:ext>
-    </p:extLst>
-  </p:cSld>
-  <p:clrMapOvr>
-    <a:masterClrMapping/>
-  </p:clrMapOvr>
-</p:notes>
-</file>
-
 <file path=ppt/notesSlides/notesSlide17.xml><?xml version="1.0" encoding="utf-8"?>
 <p:notes xmlns:a="http://schemas.openxmlformats.org/drawingml/2006/main" xmlns:r="http://schemas.openxmlformats.org/officeDocument/2006/relationships" xmlns:p="http://schemas.openxmlformats.org/presentationml/2006/main">
   <p:cSld>
@@ -3175,7 +3086,7 @@
                   <a:schemeClr val="tx1"/>
                 </a:solidFill>
               </a:rPr>
-              <a:t>Finds compromised and insider accounts by noticing when their behaviour starts to change, and includes a work-time module for HR teams.</a:t>
+              <a:t>Finds hacked and insider work accounts by spotting when their behaviour starts to change. Also includes a work-time module for HR.</a:t>
             </a:r>
             <a:endParaRPr lang="en-US" sz="1600" dirty="0"/>
           </a:p>
@@ -3657,7 +3568,7 @@
                 <a:ea typeface="Calibri" pitchFamily="34" charset="-122"/>
                 <a:cs typeface="Calibri" pitchFamily="34" charset="-120"/>
               </a:rPr>
-              <a:t>Finds hijacked and insider accounts</a:t>
+              <a:t>Spots hacked and insider accounts</a:t>
             </a:r>
             <a:endParaRPr lang="en-US" sz="1200" dirty="0"/>
           </a:p>
@@ -3901,7 +3812,7 @@
                 <a:ea typeface="Calibri" pitchFamily="34" charset="-122"/>
                 <a:cs typeface="Calibri" pitchFamily="34" charset="-120"/>
               </a:rPr>
-              <a:t>No GPU, works fully offline</a:t>
+              <a:t>No special hardware; works fully offline</a:t>
             </a:r>
             <a:endParaRPr lang="en-US" sz="1200" dirty="0"/>
           </a:p>
@@ -4166,7 +4077,7 @@
                 <a:ea typeface="Calibri" pitchFamily="34" charset="-122"/>
                 <a:cs typeface="Calibri" pitchFamily="34" charset="-120"/>
               </a:rPr>
-              <a:t>Each signal’s exact share is shown</a:t>
+              <a:t>Shows how much each signal added</a:t>
             </a:r>
             <a:endParaRPr lang="en-US" sz="1200" dirty="0"/>
           </a:p>
@@ -4312,7 +4223,7 @@
                 <a:ea typeface="Calibri" pitchFamily="34" charset="-122"/>
                 <a:cs typeface="Calibri" pitchFamily="34" charset="-120"/>
               </a:rPr>
-              <a:t>Timeline linked to every event</a:t>
+              <a:t>A timeline of every event</a:t>
             </a:r>
             <a:endParaRPr lang="en-US" sz="1200" dirty="0"/>
           </a:p>
@@ -4458,7 +4369,7 @@
                 <a:ea typeface="Calibri" pitchFamily="34" charset="-122"/>
                 <a:cs typeface="Calibri" pitchFamily="34" charset="-120"/>
               </a:rPr>
-              <a:t>Answers using only case-file facts</a:t>
+              <a:t>Answers using only the case facts</a:t>
             </a:r>
             <a:endParaRPr lang="en-US" sz="1200" dirty="0"/>
           </a:p>
@@ -4604,7 +4515,7 @@
                 <a:ea typeface="Calibri" pitchFamily="34" charset="-122"/>
                 <a:cs typeface="Calibri" pitchFamily="34" charset="-120"/>
               </a:rPr>
-              <a:t>e.g. end sessions, only with approval</a:t>
+              <a:t>e.g. log the account out, with approval</a:t>
             </a:r>
             <a:endParaRPr lang="en-US" sz="1200" dirty="0"/>
           </a:p>
@@ -4823,7 +4734,7 @@
                 <a:ea typeface="Calibri" pitchFamily="34" charset="-122"/>
                 <a:cs typeface="Calibri" pitchFamily="34" charset="-120"/>
               </a:rPr>
-              <a:t>Push login request approved</a:t>
+              <a:t>Login prompt approved on an unknown device</a:t>
             </a:r>
             <a:endParaRPr lang="en-US" sz="1200" dirty="0"/>
           </a:p>
@@ -5129,7 +5040,7 @@
                 <a:ea typeface="Calibri" pitchFamily="34" charset="-122"/>
                 <a:cs typeface="Calibri" pitchFamily="34" charset="-120"/>
               </a:rPr>
-              <a:t>Uploads to an outside bucket</a:t>
+              <a:t>Uploads it to storage outside the company</a:t>
             </a:r>
             <a:endParaRPr lang="en-US" sz="1200" dirty="0"/>
           </a:p>
@@ -5531,7 +5442,7 @@
                 <a:ea typeface="Calibri" pitchFamily="34" charset="-122"/>
                 <a:cs typeface="Calibri" pitchFamily="34" charset="-120"/>
               </a:rPr>
-              <a:t>Queries the customer database</a:t>
+              <a:t>Searches the customer database</a:t>
             </a:r>
             <a:endParaRPr lang="en-US" sz="1100" dirty="0"/>
           </a:p>
@@ -6104,7 +6015,7 @@
                 <a:ea typeface="Calibri" pitchFamily="34" charset="-122"/>
                 <a:cs typeface="Calibri" pitchFamily="34" charset="-120"/>
               </a:rPr>
-              <a:t>Log text is treated as untrusted before any AI reads it</a:t>
+              <a:t>Text found in logs is never followed as an instruction</a:t>
             </a:r>
             <a:endParaRPr lang="en-US" sz="1050" dirty="0"/>
           </a:p>
@@ -6253,7 +6164,7 @@
                   <a:schemeClr val="tx2"/>
                 </a:solidFill>
               </a:rPr>
-              <a:t>For HR and operations teams, using the same optional desktop agent.</a:t>
+              <a:t>For HR and operations teams, using the same optional desktop app.</a:t>
             </a:r>
             <a:endParaRPr lang="en-US" sz="1350" dirty="0"/>
           </a:p>
@@ -6358,7 +6269,7 @@
                 <a:ea typeface="Calibri" pitchFamily="34" charset="-122"/>
                 <a:cs typeface="Calibri" pitchFamily="34" charset="-120"/>
               </a:rPr>
-              <a:t>Desktop agent</a:t>
+              <a:t>Desktop app</a:t>
             </a:r>
             <a:endParaRPr lang="en-US" sz="1200" dirty="0"/>
           </a:p>
@@ -6375,7 +6286,7 @@
                 <a:ea typeface="Calibri" pitchFamily="34" charset="-122"/>
                 <a:cs typeface="Calibri" pitchFamily="34" charset="-120"/>
               </a:rPr>
-              <a:t>Windows, macOS, Linux; under 1% CPU</a:t>
+              <a:t>Windows, macOS, Linux; uses under 1% of the processor</a:t>
             </a:r>
             <a:endParaRPr lang="en-US" sz="1200" dirty="0"/>
           </a:p>
@@ -6567,7 +6478,7 @@
                 <a:ea typeface="Calibri" pitchFamily="34" charset="-122"/>
                 <a:cs typeface="Calibri" pitchFamily="34" charset="-120"/>
               </a:rPr>
-              <a:t>Learned per person</a:t>
+              <a:t>Based on each person’s own pattern</a:t>
             </a:r>
             <a:endParaRPr lang="en-US" sz="1200" dirty="0"/>
           </a:p>
@@ -6713,7 +6624,7 @@
                 <a:ea typeface="Calibri" pitchFamily="34" charset="-122"/>
                 <a:cs typeface="Calibri" pitchFamily="34" charset="-120"/>
               </a:rPr>
-              <a:t>Active vs idle hours, 24-hour activity ribbon</a:t>
+              <a:t>Active and idle hours, with a 24-hour activity strip</a:t>
             </a:r>
             <a:endParaRPr lang="en-US" sz="1200" dirty="0"/>
           </a:p>
@@ -7297,7 +7208,7 @@
                 <a:ea typeface="Calibri" pitchFamily="34" charset="-122"/>
                 <a:cs typeface="Calibri" pitchFamily="34" charset="-120"/>
               </a:rPr>
-              <a:t>Encrypted; flags for review and evidence</a:t>
+              <a:t>Encrypted; can be flagged for review</a:t>
             </a:r>
             <a:endParaRPr lang="en-US" sz="1200" dirty="0"/>
           </a:p>
@@ -8404,7 +8315,7 @@
                 <a:ea typeface="Calibri" pitchFamily="34" charset="-122"/>
                 <a:cs typeface="Calibri" pitchFamily="34" charset="-120"/>
               </a:rPr>
-              <a:t>Python 3.12; Pydantic checks every incoming event</a:t>
+              <a:t>Python 3.12; checks every incoming event is well formed</a:t>
             </a:r>
             <a:endParaRPr lang="en-US" sz="1050" dirty="0"/>
           </a:p>
@@ -9037,7 +8948,7 @@
                 <a:ea typeface="Calibri" pitchFamily="34" charset="-122"/>
                 <a:cs typeface="Calibri" pitchFamily="34" charset="-120"/>
               </a:rPr>
-              <a:t>Desktop agent</a:t>
+              <a:t>Desktop app</a:t>
             </a:r>
             <a:endParaRPr lang="en-US" sz="1200" dirty="0"/>
           </a:p>
@@ -9054,7 +8965,7 @@
                 <a:ea typeface="Calibri" pitchFamily="34" charset="-122"/>
                 <a:cs typeface="Calibri" pitchFamily="34" charset="-120"/>
               </a:rPr>
-              <a:t>Python app, buffers offline</a:t>
+              <a:t>Python; keeps data while offline</a:t>
             </a:r>
             <a:endParaRPr lang="en-US" sz="1200" dirty="0"/>
           </a:p>
@@ -10508,7 +10419,7 @@
                 <a:ea typeface="Calibri" pitchFamily="34" charset="-122"/>
                 <a:cs typeface="Calibri" pitchFamily="34" charset="-120"/>
               </a:rPr>
-              <a:t>Attacks written by the teammate not tuning the engine</a:t>
+              <a:t>Attacks written by the teammate who didn’t build the detector</a:t>
             </a:r>
             <a:endParaRPr lang="en-US" sz="1050" dirty="0"/>
           </a:p>
@@ -11032,7 +10943,7 @@
                 <a:ea typeface="Calibri" pitchFamily="34" charset="-122"/>
                 <a:cs typeface="Calibri" pitchFamily="34" charset="-120"/>
               </a:rPr>
-              <a:t>Live apps mocked with real data formats</a:t>
+              <a:t>Real apps simulated with their real data formats</a:t>
             </a:r>
             <a:endParaRPr lang="en-US" sz="1050" dirty="0"/>
           </a:p>
@@ -12018,7 +11929,7 @@
                 <a:ea typeface="Calibri" pitchFamily="34" charset="-122"/>
                 <a:cs typeface="Calibri" pitchFamily="34" charset="-120"/>
               </a:rPr>
-              <a:t>Records check and per-person working hours</a:t>
+              <a:t>Checks approvals and each person’s normal hours</a:t>
             </a:r>
             <a:endParaRPr lang="en-US" sz="1100" dirty="0"/>
           </a:p>
@@ -12252,7 +12163,7 @@
                 <a:ea typeface="Calibri" pitchFamily="34" charset="-122"/>
                 <a:cs typeface="Calibri" pitchFamily="34" charset="-120"/>
               </a:rPr>
-              <a:t>Four checks; faking is itself flagged</a:t>
+              <a:t>Four checks; a fake ticket is itself a warning</a:t>
             </a:r>
             <a:endParaRPr lang="en-US" sz="1100" dirty="0"/>
           </a:p>
@@ -12486,7 +12397,7 @@
                 <a:ea typeface="Calibri" pitchFamily="34" charset="-122"/>
                 <a:cs typeface="Calibri" pitchFamily="34" charset="-120"/>
               </a:rPr>
-              <a:t>Compare with a frozen earlier snapshot</a:t>
+              <a:t>Compare with a snapshot from months ago</a:t>
             </a:r>
             <a:endParaRPr lang="en-US" sz="1100" dirty="0"/>
           </a:p>
@@ -13422,7 +13333,7 @@
                 <a:ea typeface="Calibri" pitchFamily="34" charset="-122"/>
                 <a:cs typeface="Calibri" pitchFamily="34" charset="-120"/>
               </a:rPr>
-              <a:t>Test on a partner’s past logs before any sale</a:t>
+              <a:t>Test on a partner’s past logs before going live</a:t>
             </a:r>
             <a:endParaRPr lang="en-US" sz="1100" dirty="0"/>
           </a:p>
@@ -14112,7 +14023,7 @@
                 <a:ea typeface="Calibri" pitchFamily="34" charset="-122"/>
                 <a:cs typeface="Calibri" pitchFamily="34" charset="-120"/>
               </a:rPr>
-              <a:t>Allows employment and anti-espionage processing without consent</a:t>
+              <a:t>Allows processing for employment and to stop corporate spying, without consent</a:t>
             </a:r>
             <a:endParaRPr lang="en-US" sz="1050" dirty="0"/>
           </a:p>
@@ -14747,7 +14658,7 @@
                 <a:ea typeface="Calibri" pitchFamily="34" charset="-122"/>
                 <a:cs typeface="Calibri" pitchFamily="34" charset="-120"/>
               </a:rPr>
-              <a:t>Metadata only, no biometrics, a person decides</a:t>
+              <a:t>Activity details only, no biometrics, a person decides</a:t>
             </a:r>
             <a:endParaRPr lang="en-US" sz="1050" dirty="0"/>
           </a:p>
@@ -14852,7 +14763,7 @@
                 <a:ea typeface="Calibri" pitchFamily="34" charset="-122"/>
                 <a:cs typeface="Calibri" pitchFamily="34" charset="-120"/>
               </a:rPr>
-              <a:t>Germany works councils</a:t>
+              <a:t>Germany: works councils</a:t>
             </a:r>
             <a:endParaRPr lang="en-US" sz="1100" dirty="0"/>
           </a:p>
@@ -15022,7 +14933,7 @@
                 <a:ea typeface="Calibri" pitchFamily="34" charset="-122"/>
                 <a:cs typeface="Calibri" pitchFamily="34" charset="-120"/>
               </a:rPr>
-              <a:t>Ships with a draft agreement and app exclusion list</a:t>
+              <a:t>Comes with a draft agreement and a list of apps to exclude</a:t>
             </a:r>
             <a:endParaRPr lang="en-US" sz="1050" dirty="0"/>
           </a:p>
@@ -15870,1925 +15781,6 @@
             <a:fld id="{F7021451-1387-4CA6-816F-3879F97B5CBC}" type="slidenum">
               <a:rPr b="0" lang="en-US"/>
               <a:t>15</a:t>
-            </a:fld>
-            <a:endParaRPr lang="en-US"/>
-          </a:p>
-        </p:txBody>
-      </p:sp>
-    </p:spTree>
-  </p:cSld>
-  <p:clrMapOvr>
-    <a:masterClrMapping/>
-  </p:clrMapOvr>
-</p:sld>
-</file>
-
-<file path=ppt/slides/slide16.xml><?xml version="1.0" encoding="utf-8"?>
-<p:sld xmlns:a="http://schemas.openxmlformats.org/drawingml/2006/main" xmlns:r="http://schemas.openxmlformats.org/officeDocument/2006/relationships" xmlns:p="http://schemas.openxmlformats.org/presentationml/2006/main">
-  <p:cSld name="Slide 16">
-    <p:spTree>
-      <p:nvGrpSpPr>
-        <p:cNvPr id="1" name=""/>
-        <p:cNvGrpSpPr/>
-        <p:nvPr/>
-      </p:nvGrpSpPr>
-      <p:grpSpPr>
-        <a:xfrm>
-          <a:off x="0" y="0"/>
-          <a:ext cx="0" cy="0"/>
-          <a:chOff x="0" y="0"/>
-          <a:chExt cx="0" cy="0"/>
-        </a:xfrm>
-      </p:grpSpPr>
-      <p:sp>
-        <p:nvSpPr>
-          <p:cNvPr id="2" name="Text 1"/>
-          <p:cNvSpPr/>
-          <p:nvPr>
-            <p:ph idx="102" type="title" hasCustomPrompt="1"/>
-          </p:nvPr>
-        </p:nvSpPr>
-        <p:spPr>
-          <a:xfrm>
-            <a:off x="457200" y="256032"/>
-            <a:ext cx="7040880" cy="457200"/>
-          </a:xfrm>
-          <a:prstGeom prst="rect">
-            <a:avLst/>
-          </a:prstGeom>
-          <a:noFill/>
-          <a:ln/>
-        </p:spPr>
-        <p:txBody>
-          <a:bodyPr wrap="square" lIns="0" tIns="0" rIns="0" bIns="0" rtlCol="0" anchor="ctr"/>
-          <a:lstStyle/>
-          <a:p>
-            <a:pPr algn="l" indent="0" marL="0">
-              <a:buNone/>
-            </a:pPr>
-            <a:r>
-              <a:rPr lang="en-US" sz="2600" b="1" dirty="0">
-                <a:solidFill>
-                  <a:schemeClr val="tx1"/>
-                </a:solidFill>
-                <a:latin typeface="Calibri" pitchFamily="34" charset="0"/>
-                <a:ea typeface="Calibri" pitchFamily="34" charset="-122"/>
-                <a:cs typeface="Calibri" pitchFamily="34" charset="-120"/>
-              </a:rPr>
-              <a:t>How it would be sold</a:t>
-            </a:r>
-            <a:endParaRPr lang="en-US" sz="2600" dirty="0"/>
-          </a:p>
-        </p:txBody>
-      </p:sp>
-      <p:sp>
-        <p:nvSpPr>
-          <p:cNvPr id="3" name="Text 1"/>
-          <p:cNvSpPr/>
-          <p:nvPr>
-            <p:ph idx="103" type="body" hasCustomPrompt="1"/>
-          </p:nvPr>
-        </p:nvSpPr>
-        <p:spPr>
-          <a:xfrm>
-            <a:off x="457200" y="731520"/>
-            <a:ext cx="7315200" cy="320040"/>
-          </a:xfrm>
-          <a:prstGeom prst="rect">
-            <a:avLst/>
-          </a:prstGeom>
-          <a:noFill/>
-          <a:ln/>
-        </p:spPr>
-        <p:txBody>
-          <a:bodyPr wrap="square" lIns="0" tIns="0" rIns="0" bIns="0" rtlCol="0" anchor="t"/>
-          <a:lstStyle/>
-          <a:p>
-            <a:pPr algn="l" indent="0" marL="0">
-              <a:buNone/>
-            </a:pPr>
-            <a:r>
-              <a:rPr lang="en-US" sz="1350" dirty="0">
-                <a:solidFill>
-                  <a:schemeClr val="tx2"/>
-                </a:solidFill>
-              </a:rPr>
-              <a:t>Priced per account per year, aimed first at Indian companies with 500 to 3,000 staff.</a:t>
-            </a:r>
-            <a:endParaRPr lang="en-US" sz="1350" dirty="0"/>
-          </a:p>
-        </p:txBody>
-      </p:sp>
-      <p:sp>
-        <p:nvSpPr>
-          <p:cNvPr id="4" name="Shape 2"/>
-          <p:cNvSpPr/>
-          <p:nvPr/>
-        </p:nvSpPr>
-        <p:spPr>
-          <a:xfrm>
-            <a:off x="457200" y="1143000"/>
-            <a:ext cx="1920240" cy="685800"/>
-          </a:xfrm>
-          <a:prstGeom prst="roundRect">
-            <a:avLst>
-              <a:gd name="adj" fmla="val 10667"/>
-            </a:avLst>
-          </a:prstGeom>
-          <a:solidFill>
-            <a:srgbClr val="CFFAFE"/>
-          </a:solidFill>
-          <a:ln/>
-        </p:spPr>
-      </p:sp>
-      <p:sp>
-        <p:nvSpPr>
-          <p:cNvPr id="5" name="Shape 3"/>
-          <p:cNvSpPr/>
-          <p:nvPr/>
-        </p:nvSpPr>
-        <p:spPr>
-          <a:xfrm>
-            <a:off x="566928" y="1339596"/>
-            <a:ext cx="292608" cy="292608"/>
-          </a:xfrm>
-          <a:prstGeom prst="ellipse">
-            <a:avLst/>
-          </a:prstGeom>
-          <a:solidFill>
-            <a:srgbClr val="0891B2"/>
-          </a:solidFill>
-          <a:ln/>
-        </p:spPr>
-      </p:sp>
-      <p:pic>
-        <p:nvPicPr>
-          <p:cNvPr id="6" name="Image 0" descr="preencoded.png">    </p:cNvPr>
-          <p:cNvPicPr>
-            <a:picLocks noChangeAspect="1"/>
-          </p:cNvPicPr>
-          <p:nvPr/>
-        </p:nvPicPr>
-        <p:blipFill>
-          <a:blip r:embed="rId1"/>
-          <a:stretch>
-            <a:fillRect/>
-          </a:stretch>
-        </p:blipFill>
-        <p:spPr>
-          <a:xfrm>
-            <a:off x="637154" y="1409822"/>
-            <a:ext cx="152156" cy="152156"/>
-          </a:xfrm>
-          <a:prstGeom prst="rect">
-            <a:avLst/>
-          </a:prstGeom>
-        </p:spPr>
-      </p:pic>
-      <p:sp>
-        <p:nvSpPr>
-          <p:cNvPr id="7" name="Text 4"/>
-          <p:cNvSpPr txBox="1"/>
-          <p:nvPr/>
-        </p:nvSpPr>
-        <p:spPr>
-          <a:xfrm>
-            <a:off x="969264" y="1188720"/>
-            <a:ext cx="1316736" cy="594360"/>
-          </a:xfrm>
-          <a:prstGeom prst="rect">
-            <a:avLst/>
-          </a:prstGeom>
-          <a:noFill/>
-          <a:ln/>
-        </p:spPr>
-        <p:txBody>
-          <a:bodyPr wrap="square" lIns="0" tIns="0" rIns="0" bIns="0" rtlCol="0" anchor="ctr"/>
-          <a:lstStyle/>
-          <a:p>
-            <a:pPr algn="l" indent="0" marL="0">
-              <a:buNone/>
-            </a:pPr>
-            <a:r>
-              <a:rPr lang="en-US" sz="1200" b="1" dirty="0">
-                <a:solidFill>
-                  <a:srgbClr val="1E1B4B"/>
-                </a:solidFill>
-                <a:latin typeface="Calibri" pitchFamily="34" charset="0"/>
-                <a:ea typeface="Calibri" pitchFamily="34" charset="-122"/>
-                <a:cs typeface="Calibri" pitchFamily="34" charset="-120"/>
-              </a:rPr>
-              <a:t>Cloud ₹3,000</a:t>
-            </a:r>
-            <a:endParaRPr lang="en-US" sz="1200" dirty="0"/>
-          </a:p>
-          <a:p>
-            <a:pPr algn="l" indent="0" marL="0">
-              <a:buNone/>
-            </a:pPr>
-            <a:r>
-              <a:rPr lang="en-US" sz="1050" dirty="0">
-                <a:solidFill>
-                  <a:srgbClr val="1E1B4B"/>
-                </a:solidFill>
-                <a:latin typeface="Calibri" pitchFamily="34" charset="0"/>
-                <a:ea typeface="Calibri" pitchFamily="34" charset="-122"/>
-                <a:cs typeface="Calibri" pitchFamily="34" charset="-120"/>
-              </a:rPr>
-              <a:t>Security part, no agent</a:t>
-            </a:r>
-            <a:endParaRPr lang="en-US" sz="1200" dirty="0"/>
-          </a:p>
-        </p:txBody>
-      </p:sp>
-      <p:sp>
-        <p:nvSpPr>
-          <p:cNvPr id="8" name="Shape 5"/>
-          <p:cNvSpPr/>
-          <p:nvPr/>
-        </p:nvSpPr>
-        <p:spPr>
-          <a:xfrm>
-            <a:off x="2560320" y="1143000"/>
-            <a:ext cx="1920240" cy="685800"/>
-          </a:xfrm>
-          <a:prstGeom prst="roundRect">
-            <a:avLst>
-              <a:gd name="adj" fmla="val 10667"/>
-            </a:avLst>
-          </a:prstGeom>
-          <a:solidFill>
-            <a:srgbClr val="FCE7F3"/>
-          </a:solidFill>
-          <a:ln/>
-        </p:spPr>
-      </p:sp>
-      <p:sp>
-        <p:nvSpPr>
-          <p:cNvPr id="9" name="Shape 6"/>
-          <p:cNvSpPr/>
-          <p:nvPr/>
-        </p:nvSpPr>
-        <p:spPr>
-          <a:xfrm>
-            <a:off x="2670048" y="1339596"/>
-            <a:ext cx="292608" cy="292608"/>
-          </a:xfrm>
-          <a:prstGeom prst="ellipse">
-            <a:avLst/>
-          </a:prstGeom>
-          <a:solidFill>
-            <a:srgbClr val="DB2777"/>
-          </a:solidFill>
-          <a:ln/>
-        </p:spPr>
-      </p:sp>
-      <p:pic>
-        <p:nvPicPr>
-          <p:cNvPr id="10" name="Image 1" descr="preencoded.png">    </p:cNvPr>
-          <p:cNvPicPr>
-            <a:picLocks noChangeAspect="1"/>
-          </p:cNvPicPr>
-          <p:nvPr/>
-        </p:nvPicPr>
-        <p:blipFill>
-          <a:blip r:embed="rId2"/>
-          <a:stretch>
-            <a:fillRect/>
-          </a:stretch>
-        </p:blipFill>
-        <p:spPr>
-          <a:xfrm>
-            <a:off x="2740274" y="1409822"/>
-            <a:ext cx="152156" cy="152156"/>
-          </a:xfrm>
-          <a:prstGeom prst="rect">
-            <a:avLst/>
-          </a:prstGeom>
-        </p:spPr>
-      </p:pic>
-      <p:sp>
-        <p:nvSpPr>
-          <p:cNvPr id="11" name="Text 7"/>
-          <p:cNvSpPr txBox="1"/>
-          <p:nvPr/>
-        </p:nvSpPr>
-        <p:spPr>
-          <a:xfrm>
-            <a:off x="3072384" y="1188720"/>
-            <a:ext cx="1316736" cy="594360"/>
-          </a:xfrm>
-          <a:prstGeom prst="rect">
-            <a:avLst/>
-          </a:prstGeom>
-          <a:noFill/>
-          <a:ln/>
-        </p:spPr>
-        <p:txBody>
-          <a:bodyPr wrap="square" lIns="0" tIns="0" rIns="0" bIns="0" rtlCol="0" anchor="ctr"/>
-          <a:lstStyle/>
-          <a:p>
-            <a:pPr algn="l" indent="0" marL="0">
-              <a:buNone/>
-            </a:pPr>
-            <a:r>
-              <a:rPr lang="en-US" sz="1200" b="1" dirty="0">
-                <a:solidFill>
-                  <a:srgbClr val="1E1B4B"/>
-                </a:solidFill>
-                <a:latin typeface="Calibri" pitchFamily="34" charset="0"/>
-                <a:ea typeface="Calibri" pitchFamily="34" charset="-122"/>
-                <a:cs typeface="Calibri" pitchFamily="34" charset="-120"/>
-              </a:rPr>
-              <a:t>Agent ₹7,000</a:t>
-            </a:r>
-            <a:endParaRPr lang="en-US" sz="1200" dirty="0"/>
-          </a:p>
-          <a:p>
-            <a:pPr algn="l" indent="0" marL="0">
-              <a:buNone/>
-            </a:pPr>
-            <a:r>
-              <a:rPr lang="en-US" sz="1050" dirty="0">
-                <a:solidFill>
-                  <a:srgbClr val="1E1B4B"/>
-                </a:solidFill>
-                <a:latin typeface="Calibri" pitchFamily="34" charset="0"/>
-                <a:ea typeface="Calibri" pitchFamily="34" charset="-122"/>
-                <a:cs typeface="Calibri" pitchFamily="34" charset="-120"/>
-              </a:rPr>
-              <a:t>Adds workforce part</a:t>
-            </a:r>
-            <a:endParaRPr lang="en-US" sz="1200" dirty="0"/>
-          </a:p>
-        </p:txBody>
-      </p:sp>
-      <p:sp>
-        <p:nvSpPr>
-          <p:cNvPr id="12" name="Shape 8"/>
-          <p:cNvSpPr/>
-          <p:nvPr/>
-        </p:nvSpPr>
-        <p:spPr>
-          <a:xfrm>
-            <a:off x="4663440" y="1143000"/>
-            <a:ext cx="1920240" cy="685800"/>
-          </a:xfrm>
-          <a:prstGeom prst="roundRect">
-            <a:avLst>
-              <a:gd name="adj" fmla="val 10667"/>
-            </a:avLst>
-          </a:prstGeom>
-          <a:solidFill>
-            <a:srgbClr val="FFEDD5"/>
-          </a:solidFill>
-          <a:ln/>
-        </p:spPr>
-      </p:sp>
-      <p:sp>
-        <p:nvSpPr>
-          <p:cNvPr id="13" name="Shape 9"/>
-          <p:cNvSpPr/>
-          <p:nvPr/>
-        </p:nvSpPr>
-        <p:spPr>
-          <a:xfrm>
-            <a:off x="4773168" y="1339596"/>
-            <a:ext cx="292608" cy="292608"/>
-          </a:xfrm>
-          <a:prstGeom prst="ellipse">
-            <a:avLst/>
-          </a:prstGeom>
-          <a:solidFill>
-            <a:srgbClr val="EA580C"/>
-          </a:solidFill>
-          <a:ln/>
-        </p:spPr>
-      </p:sp>
-      <p:pic>
-        <p:nvPicPr>
-          <p:cNvPr id="14" name="Image 2" descr="preencoded.png">    </p:cNvPr>
-          <p:cNvPicPr>
-            <a:picLocks noChangeAspect="1"/>
-          </p:cNvPicPr>
-          <p:nvPr/>
-        </p:nvPicPr>
-        <p:blipFill>
-          <a:blip r:embed="rId3"/>
-          <a:stretch>
-            <a:fillRect/>
-          </a:stretch>
-        </p:blipFill>
-        <p:spPr>
-          <a:xfrm>
-            <a:off x="4843394" y="1409822"/>
-            <a:ext cx="152156" cy="152156"/>
-          </a:xfrm>
-          <a:prstGeom prst="rect">
-            <a:avLst/>
-          </a:prstGeom>
-        </p:spPr>
-      </p:pic>
-      <p:sp>
-        <p:nvSpPr>
-          <p:cNvPr id="15" name="Text 10"/>
-          <p:cNvSpPr txBox="1"/>
-          <p:nvPr/>
-        </p:nvSpPr>
-        <p:spPr>
-          <a:xfrm>
-            <a:off x="5175504" y="1188720"/>
-            <a:ext cx="1316736" cy="594360"/>
-          </a:xfrm>
-          <a:prstGeom prst="rect">
-            <a:avLst/>
-          </a:prstGeom>
-          <a:noFill/>
-          <a:ln/>
-        </p:spPr>
-        <p:txBody>
-          <a:bodyPr wrap="square" lIns="0" tIns="0" rIns="0" bIns="0" rtlCol="0" anchor="ctr"/>
-          <a:lstStyle/>
-          <a:p>
-            <a:pPr algn="l" indent="0" marL="0">
-              <a:buNone/>
-            </a:pPr>
-            <a:r>
-              <a:rPr lang="en-US" sz="1200" b="1" dirty="0">
-                <a:solidFill>
-                  <a:srgbClr val="1E1B4B"/>
-                </a:solidFill>
-                <a:latin typeface="Calibri" pitchFamily="34" charset="0"/>
-                <a:ea typeface="Calibri" pitchFamily="34" charset="-122"/>
-                <a:cs typeface="Calibri" pitchFamily="34" charset="-120"/>
-              </a:rPr>
-              <a:t>Screenshots ₹11,000</a:t>
-            </a:r>
-            <a:endParaRPr lang="en-US" sz="1200" dirty="0"/>
-          </a:p>
-          <a:p>
-            <a:pPr algn="l" indent="0" marL="0">
-              <a:buNone/>
-            </a:pPr>
-            <a:r>
-              <a:rPr lang="en-US" sz="1050" dirty="0">
-                <a:solidFill>
-                  <a:srgbClr val="1E1B4B"/>
-                </a:solidFill>
-                <a:latin typeface="Calibri" pitchFamily="34" charset="0"/>
-                <a:ea typeface="Calibri" pitchFamily="34" charset="-122"/>
-                <a:cs typeface="Calibri" pitchFamily="34" charset="-120"/>
-              </a:rPr>
-              <a:t>Agent plus screenshots</a:t>
-            </a:r>
-            <a:endParaRPr lang="en-US" sz="1200" dirty="0"/>
-          </a:p>
-        </p:txBody>
-      </p:sp>
-      <p:sp>
-        <p:nvSpPr>
-          <p:cNvPr id="16" name="Shape 11"/>
-          <p:cNvSpPr/>
-          <p:nvPr/>
-        </p:nvSpPr>
-        <p:spPr>
-          <a:xfrm>
-            <a:off x="6766560" y="1143000"/>
-            <a:ext cx="1920240" cy="685800"/>
-          </a:xfrm>
-          <a:prstGeom prst="roundRect">
-            <a:avLst>
-              <a:gd name="adj" fmla="val 10667"/>
-            </a:avLst>
-          </a:prstGeom>
-          <a:solidFill>
-            <a:srgbClr val="D1FAE5"/>
-          </a:solidFill>
-          <a:ln/>
-        </p:spPr>
-      </p:sp>
-      <p:sp>
-        <p:nvSpPr>
-          <p:cNvPr id="17" name="Shape 12"/>
-          <p:cNvSpPr/>
-          <p:nvPr/>
-        </p:nvSpPr>
-        <p:spPr>
-          <a:xfrm>
-            <a:off x="6876288" y="1339596"/>
-            <a:ext cx="292608" cy="292608"/>
-          </a:xfrm>
-          <a:prstGeom prst="ellipse">
-            <a:avLst/>
-          </a:prstGeom>
-          <a:solidFill>
-            <a:srgbClr val="009A65"/>
-          </a:solidFill>
-          <a:ln/>
-        </p:spPr>
-      </p:sp>
-      <p:pic>
-        <p:nvPicPr>
-          <p:cNvPr id="18" name="Image 3" descr="preencoded.png">    </p:cNvPr>
-          <p:cNvPicPr>
-            <a:picLocks noChangeAspect="1"/>
-          </p:cNvPicPr>
-          <p:nvPr/>
-        </p:nvPicPr>
-        <p:blipFill>
-          <a:blip r:embed="rId4"/>
-          <a:stretch>
-            <a:fillRect/>
-          </a:stretch>
-        </p:blipFill>
-        <p:spPr>
-          <a:xfrm>
-            <a:off x="6946514" y="1409822"/>
-            <a:ext cx="152156" cy="152156"/>
-          </a:xfrm>
-          <a:prstGeom prst="rect">
-            <a:avLst/>
-          </a:prstGeom>
-        </p:spPr>
-      </p:pic>
-      <p:sp>
-        <p:nvSpPr>
-          <p:cNvPr id="19" name="Text 13"/>
-          <p:cNvSpPr txBox="1"/>
-          <p:nvPr/>
-        </p:nvSpPr>
-        <p:spPr>
-          <a:xfrm>
-            <a:off x="7278624" y="1188720"/>
-            <a:ext cx="1316736" cy="594360"/>
-          </a:xfrm>
-          <a:prstGeom prst="rect">
-            <a:avLst/>
-          </a:prstGeom>
-          <a:noFill/>
-          <a:ln/>
-        </p:spPr>
-        <p:txBody>
-          <a:bodyPr wrap="square" lIns="0" tIns="0" rIns="0" bIns="0" rtlCol="0" anchor="ctr"/>
-          <a:lstStyle/>
-          <a:p>
-            <a:pPr algn="l" indent="0" marL="0">
-              <a:buNone/>
-            </a:pPr>
-            <a:r>
-              <a:rPr lang="en-US" sz="1200" b="1" dirty="0">
-                <a:solidFill>
-                  <a:srgbClr val="1E1B4B"/>
-                </a:solidFill>
-                <a:latin typeface="Calibri" pitchFamily="34" charset="0"/>
-                <a:ea typeface="Calibri" pitchFamily="34" charset="-122"/>
-                <a:cs typeface="Calibri" pitchFamily="34" charset="-120"/>
-              </a:rPr>
-              <a:t>Non-human ₹5,000</a:t>
-            </a:r>
-            <a:endParaRPr lang="en-US" sz="1200" dirty="0"/>
-          </a:p>
-          <a:p>
-            <a:pPr algn="l" indent="0" marL="0">
-              <a:buNone/>
-            </a:pPr>
-            <a:r>
-              <a:rPr lang="en-US" sz="1050" dirty="0">
-                <a:solidFill>
-                  <a:srgbClr val="1E1B4B"/>
-                </a:solidFill>
-                <a:latin typeface="Calibri" pitchFamily="34" charset="0"/>
-                <a:ea typeface="Calibri" pitchFamily="34" charset="-122"/>
-                <a:cs typeface="Calibri" pitchFamily="34" charset="-120"/>
-              </a:rPr>
-              <a:t>Service and AI accounts</a:t>
-            </a:r>
-            <a:endParaRPr lang="en-US" sz="1200" dirty="0"/>
-          </a:p>
-        </p:txBody>
-      </p:sp>
-      <p:sp>
-        <p:nvSpPr>
-          <p:cNvPr id="20" name="Text 14"/>
-          <p:cNvSpPr txBox="1"/>
-          <p:nvPr/>
-        </p:nvSpPr>
-        <p:spPr>
-          <a:xfrm>
-            <a:off x="457200" y="1965960"/>
-            <a:ext cx="5486400" cy="219456"/>
-          </a:xfrm>
-          <a:prstGeom prst="rect">
-            <a:avLst/>
-          </a:prstGeom>
-          <a:noFill/>
-          <a:ln/>
-        </p:spPr>
-        <p:txBody>
-          <a:bodyPr wrap="square" lIns="0" tIns="0" rIns="0" bIns="0" rtlCol="0" anchor="t"/>
-          <a:lstStyle/>
-          <a:p>
-            <a:pPr indent="0" marL="0">
-              <a:buNone/>
-            </a:pPr>
-            <a:r>
-              <a:rPr lang="en-US" sz="1150" b="1" dirty="0">
-                <a:solidFill>
-                  <a:srgbClr val="009A65"/>
-                </a:solidFill>
-                <a:latin typeface="Calibri" pitchFamily="34" charset="0"/>
-                <a:ea typeface="Calibri" pitchFamily="34" charset="-122"/>
-                <a:cs typeface="Calibri" pitchFamily="34" charset="-120"/>
-              </a:rPr>
-              <a:t>The first sale: a free audit on the customer’s own data</a:t>
-            </a:r>
-            <a:endParaRPr lang="en-US" sz="1150" dirty="0"/>
-          </a:p>
-        </p:txBody>
-      </p:sp>
-      <p:sp>
-        <p:nvSpPr>
-          <p:cNvPr id="21" name="Shape 15"/>
-          <p:cNvSpPr/>
-          <p:nvPr/>
-        </p:nvSpPr>
-        <p:spPr>
-          <a:xfrm>
-            <a:off x="457200" y="2212848"/>
-            <a:ext cx="1885950" cy="731520"/>
-          </a:xfrm>
-          <a:prstGeom prst="roundRect">
-            <a:avLst>
-              <a:gd name="adj" fmla="val 10000"/>
-            </a:avLst>
-          </a:prstGeom>
-          <a:solidFill>
-            <a:srgbClr val="DBEAFE"/>
-          </a:solidFill>
-          <a:ln/>
-        </p:spPr>
-      </p:sp>
-      <p:sp>
-        <p:nvSpPr>
-          <p:cNvPr id="22" name="Shape 16"/>
-          <p:cNvSpPr/>
-          <p:nvPr/>
-        </p:nvSpPr>
-        <p:spPr>
-          <a:xfrm>
-            <a:off x="566928" y="2404872"/>
-            <a:ext cx="347472" cy="347472"/>
-          </a:xfrm>
-          <a:prstGeom prst="ellipse">
-            <a:avLst/>
-          </a:prstGeom>
-          <a:solidFill>
-            <a:srgbClr val="2563EB"/>
-          </a:solidFill>
-          <a:ln/>
-        </p:spPr>
-      </p:sp>
-      <p:pic>
-        <p:nvPicPr>
-          <p:cNvPr id="23" name="Image 4" descr="preencoded.png">    </p:cNvPr>
-          <p:cNvPicPr>
-            <a:picLocks noChangeAspect="1"/>
-          </p:cNvPicPr>
-          <p:nvPr/>
-        </p:nvPicPr>
-        <p:blipFill>
-          <a:blip r:embed="rId5"/>
-          <a:stretch>
-            <a:fillRect/>
-          </a:stretch>
-        </p:blipFill>
-        <p:spPr>
-          <a:xfrm>
-            <a:off x="650321" y="2488265"/>
-            <a:ext cx="180685" cy="180685"/>
-          </a:xfrm>
-          <a:prstGeom prst="rect">
-            <a:avLst/>
-          </a:prstGeom>
-        </p:spPr>
-      </p:pic>
-      <p:sp>
-        <p:nvSpPr>
-          <p:cNvPr id="24" name="Text 17"/>
-          <p:cNvSpPr txBox="1"/>
-          <p:nvPr/>
-        </p:nvSpPr>
-        <p:spPr>
-          <a:xfrm>
-            <a:off x="1024128" y="2258568"/>
-            <a:ext cx="1227582" cy="640080"/>
-          </a:xfrm>
-          <a:prstGeom prst="rect">
-            <a:avLst/>
-          </a:prstGeom>
-          <a:noFill/>
-          <a:ln/>
-        </p:spPr>
-        <p:txBody>
-          <a:bodyPr wrap="square" lIns="0" tIns="0" rIns="0" bIns="0" rtlCol="0" anchor="ctr"/>
-          <a:lstStyle/>
-          <a:p>
-            <a:pPr algn="l" indent="0" marL="0">
-              <a:buNone/>
-            </a:pPr>
-            <a:r>
-              <a:rPr lang="en-US" sz="1200" b="1" dirty="0">
-                <a:solidFill>
-                  <a:srgbClr val="1E1B4B"/>
-                </a:solidFill>
-                <a:latin typeface="Calibri" pitchFamily="34" charset="0"/>
-                <a:ea typeface="Calibri" pitchFamily="34" charset="-122"/>
-                <a:cs typeface="Calibri" pitchFamily="34" charset="-120"/>
-              </a:rPr>
-              <a:t>Connect</a:t>
-            </a:r>
-            <a:endParaRPr lang="en-US" sz="1200" dirty="0"/>
-          </a:p>
-          <a:p>
-            <a:pPr algn="l" indent="0" marL="0">
-              <a:buNone/>
-            </a:pPr>
-            <a:r>
-              <a:rPr lang="en-US" sz="1050" dirty="0">
-                <a:solidFill>
-                  <a:srgbClr val="1E1B4B"/>
-                </a:solidFill>
-                <a:latin typeface="Calibri" pitchFamily="34" charset="0"/>
-                <a:ea typeface="Calibri" pitchFamily="34" charset="-122"/>
-                <a:cs typeface="Calibri" pitchFamily="34" charset="-120"/>
-              </a:rPr>
-              <a:t>15 minutes, read-only access to Okta and GitHub</a:t>
-            </a:r>
-            <a:endParaRPr lang="en-US" sz="1200" dirty="0"/>
-          </a:p>
-        </p:txBody>
-      </p:sp>
-      <p:sp>
-        <p:nvSpPr>
-          <p:cNvPr id="25" name="Shape 18"/>
-          <p:cNvSpPr/>
-          <p:nvPr/>
-        </p:nvSpPr>
-        <p:spPr>
-          <a:xfrm>
-            <a:off x="2361438" y="2578608"/>
-            <a:ext cx="192024" cy="0"/>
-          </a:xfrm>
-          <a:prstGeom prst="line">
-            <a:avLst/>
-          </a:prstGeom>
-          <a:noFill/>
-          <a:ln w="22225">
-            <a:solidFill>
-              <a:srgbClr val="64748B"/>
-            </a:solidFill>
-            <a:prstDash val="solid"/>
-            <a:tailEnd type="triangle"/>
-          </a:ln>
-        </p:spPr>
-      </p:sp>
-      <p:sp>
-        <p:nvSpPr>
-          <p:cNvPr id="26" name="Shape 19"/>
-          <p:cNvSpPr/>
-          <p:nvPr/>
-        </p:nvSpPr>
-        <p:spPr>
-          <a:xfrm>
-            <a:off x="2571750" y="2212848"/>
-            <a:ext cx="1885950" cy="731520"/>
-          </a:xfrm>
-          <a:prstGeom prst="roundRect">
-            <a:avLst>
-              <a:gd name="adj" fmla="val 10000"/>
-            </a:avLst>
-          </a:prstGeom>
-          <a:solidFill>
-            <a:srgbClr val="D1FAE5"/>
-          </a:solidFill>
-          <a:ln/>
-        </p:spPr>
-      </p:sp>
-      <p:sp>
-        <p:nvSpPr>
-          <p:cNvPr id="27" name="Shape 20"/>
-          <p:cNvSpPr/>
-          <p:nvPr/>
-        </p:nvSpPr>
-        <p:spPr>
-          <a:xfrm>
-            <a:off x="2681478" y="2404872"/>
-            <a:ext cx="347472" cy="347472"/>
-          </a:xfrm>
-          <a:prstGeom prst="ellipse">
-            <a:avLst/>
-          </a:prstGeom>
-          <a:solidFill>
-            <a:srgbClr val="009A65"/>
-          </a:solidFill>
-          <a:ln/>
-        </p:spPr>
-      </p:sp>
-      <p:pic>
-        <p:nvPicPr>
-          <p:cNvPr id="28" name="Image 5" descr="preencoded.png">    </p:cNvPr>
-          <p:cNvPicPr>
-            <a:picLocks noChangeAspect="1"/>
-          </p:cNvPicPr>
-          <p:nvPr/>
-        </p:nvPicPr>
-        <p:blipFill>
-          <a:blip r:embed="rId6"/>
-          <a:stretch>
-            <a:fillRect/>
-          </a:stretch>
-        </p:blipFill>
-        <p:spPr>
-          <a:xfrm>
-            <a:off x="2764871" y="2488265"/>
-            <a:ext cx="180685" cy="180685"/>
-          </a:xfrm>
-          <a:prstGeom prst="rect">
-            <a:avLst/>
-          </a:prstGeom>
-        </p:spPr>
-      </p:pic>
-      <p:sp>
-        <p:nvSpPr>
-          <p:cNvPr id="29" name="Text 21"/>
-          <p:cNvSpPr txBox="1"/>
-          <p:nvPr/>
-        </p:nvSpPr>
-        <p:spPr>
-          <a:xfrm>
-            <a:off x="3138678" y="2258568"/>
-            <a:ext cx="1227582" cy="640080"/>
-          </a:xfrm>
-          <a:prstGeom prst="rect">
-            <a:avLst/>
-          </a:prstGeom>
-          <a:noFill/>
-          <a:ln/>
-        </p:spPr>
-        <p:txBody>
-          <a:bodyPr wrap="square" lIns="0" tIns="0" rIns="0" bIns="0" rtlCol="0" anchor="ctr"/>
-          <a:lstStyle/>
-          <a:p>
-            <a:pPr algn="l" indent="0" marL="0">
-              <a:buNone/>
-            </a:pPr>
-            <a:r>
-              <a:rPr lang="en-US" sz="1200" b="1" dirty="0">
-                <a:solidFill>
-                  <a:srgbClr val="1E1B4B"/>
-                </a:solidFill>
-                <a:latin typeface="Calibri" pitchFamily="34" charset="0"/>
-                <a:ea typeface="Calibri" pitchFamily="34" charset="-122"/>
-                <a:cs typeface="Calibri" pitchFamily="34" charset="-120"/>
-              </a:rPr>
-              <a:t>Replay</a:t>
-            </a:r>
-            <a:endParaRPr lang="en-US" sz="1200" dirty="0"/>
-          </a:p>
-          <a:p>
-            <a:pPr algn="l" indent="0" marL="0">
-              <a:buNone/>
-            </a:pPr>
-            <a:r>
-              <a:rPr lang="en-US" sz="1050" dirty="0">
-                <a:solidFill>
-                  <a:srgbClr val="1E1B4B"/>
-                </a:solidFill>
-                <a:latin typeface="Calibri" pitchFamily="34" charset="0"/>
-                <a:ea typeface="Calibri" pitchFamily="34" charset="-122"/>
-                <a:cs typeface="Calibri" pitchFamily="34" charset="-120"/>
-              </a:rPr>
-              <a:t>About 2 hours to process 90 days of existing logs</a:t>
-            </a:r>
-            <a:endParaRPr lang="en-US" sz="1200" dirty="0"/>
-          </a:p>
-        </p:txBody>
-      </p:sp>
-      <p:sp>
-        <p:nvSpPr>
-          <p:cNvPr id="30" name="Shape 22"/>
-          <p:cNvSpPr/>
-          <p:nvPr/>
-        </p:nvSpPr>
-        <p:spPr>
-          <a:xfrm>
-            <a:off x="4475988" y="2578608"/>
-            <a:ext cx="192024" cy="0"/>
-          </a:xfrm>
-          <a:prstGeom prst="line">
-            <a:avLst/>
-          </a:prstGeom>
-          <a:noFill/>
-          <a:ln w="22225">
-            <a:solidFill>
-              <a:srgbClr val="64748B"/>
-            </a:solidFill>
-            <a:prstDash val="solid"/>
-            <a:tailEnd type="triangle"/>
-          </a:ln>
-        </p:spPr>
-      </p:sp>
-      <p:sp>
-        <p:nvSpPr>
-          <p:cNvPr id="31" name="Shape 23"/>
-          <p:cNvSpPr/>
-          <p:nvPr/>
-        </p:nvSpPr>
-        <p:spPr>
-          <a:xfrm>
-            <a:off x="4686300" y="2212848"/>
-            <a:ext cx="1885950" cy="731520"/>
-          </a:xfrm>
-          <a:prstGeom prst="roundRect">
-            <a:avLst>
-              <a:gd name="adj" fmla="val 10000"/>
-            </a:avLst>
-          </a:prstGeom>
-          <a:solidFill>
-            <a:srgbClr val="FEF3C7"/>
-          </a:solidFill>
-          <a:ln/>
-        </p:spPr>
-      </p:sp>
-      <p:sp>
-        <p:nvSpPr>
-          <p:cNvPr id="32" name="Shape 24"/>
-          <p:cNvSpPr/>
-          <p:nvPr/>
-        </p:nvSpPr>
-        <p:spPr>
-          <a:xfrm>
-            <a:off x="4796028" y="2404872"/>
-            <a:ext cx="347472" cy="347472"/>
-          </a:xfrm>
-          <a:prstGeom prst="ellipse">
-            <a:avLst/>
-          </a:prstGeom>
-          <a:solidFill>
-            <a:srgbClr val="D97706"/>
-          </a:solidFill>
-          <a:ln/>
-        </p:spPr>
-      </p:sp>
-      <p:pic>
-        <p:nvPicPr>
-          <p:cNvPr id="33" name="Image 6" descr="preencoded.png">    </p:cNvPr>
-          <p:cNvPicPr>
-            <a:picLocks noChangeAspect="1"/>
-          </p:cNvPicPr>
-          <p:nvPr/>
-        </p:nvPicPr>
-        <p:blipFill>
-          <a:blip r:embed="rId7"/>
-          <a:stretch>
-            <a:fillRect/>
-          </a:stretch>
-        </p:blipFill>
-        <p:spPr>
-          <a:xfrm>
-            <a:off x="4879421" y="2488265"/>
-            <a:ext cx="180685" cy="180685"/>
-          </a:xfrm>
-          <a:prstGeom prst="rect">
-            <a:avLst/>
-          </a:prstGeom>
-        </p:spPr>
-      </p:pic>
-      <p:sp>
-        <p:nvSpPr>
-          <p:cNvPr id="34" name="Text 25"/>
-          <p:cNvSpPr txBox="1"/>
-          <p:nvPr/>
-        </p:nvSpPr>
-        <p:spPr>
-          <a:xfrm>
-            <a:off x="5253228" y="2258568"/>
-            <a:ext cx="1227582" cy="640080"/>
-          </a:xfrm>
-          <a:prstGeom prst="rect">
-            <a:avLst/>
-          </a:prstGeom>
-          <a:noFill/>
-          <a:ln/>
-        </p:spPr>
-        <p:txBody>
-          <a:bodyPr wrap="square" lIns="0" tIns="0" rIns="0" bIns="0" rtlCol="0" anchor="ctr"/>
-          <a:lstStyle/>
-          <a:p>
-            <a:pPr algn="l" indent="0" marL="0">
-              <a:buNone/>
-            </a:pPr>
-            <a:r>
-              <a:rPr lang="en-US" sz="1200" b="1" dirty="0">
-                <a:solidFill>
-                  <a:srgbClr val="1E1B4B"/>
-                </a:solidFill>
-                <a:latin typeface="Calibri" pitchFamily="34" charset="0"/>
-                <a:ea typeface="Calibri" pitchFamily="34" charset="-122"/>
-                <a:cs typeface="Calibri" pitchFamily="34" charset="-120"/>
-              </a:rPr>
-              <a:t>Report</a:t>
-            </a:r>
-            <a:endParaRPr lang="en-US" sz="1200" dirty="0"/>
-          </a:p>
-          <a:p>
-            <a:pPr algn="l" indent="0" marL="0">
-              <a:buNone/>
-            </a:pPr>
-            <a:r>
-              <a:rPr lang="en-US" sz="1050" dirty="0">
-                <a:solidFill>
-                  <a:srgbClr val="1E1B4B"/>
-                </a:solidFill>
-                <a:latin typeface="Calibri" pitchFamily="34" charset="0"/>
-                <a:ea typeface="Calibri" pitchFamily="34" charset="-122"/>
-                <a:cs typeface="Calibri" pitchFamily="34" charset="-120"/>
-              </a:rPr>
-              <a:t>Findings in their own data by day two</a:t>
-            </a:r>
-            <a:endParaRPr lang="en-US" sz="1200" dirty="0"/>
-          </a:p>
-        </p:txBody>
-      </p:sp>
-      <p:sp>
-        <p:nvSpPr>
-          <p:cNvPr id="35" name="Shape 26"/>
-          <p:cNvSpPr/>
-          <p:nvPr/>
-        </p:nvSpPr>
-        <p:spPr>
-          <a:xfrm>
-            <a:off x="6590538" y="2578608"/>
-            <a:ext cx="192024" cy="0"/>
-          </a:xfrm>
-          <a:prstGeom prst="line">
-            <a:avLst/>
-          </a:prstGeom>
-          <a:noFill/>
-          <a:ln w="22225">
-            <a:solidFill>
-              <a:srgbClr val="64748B"/>
-            </a:solidFill>
-            <a:prstDash val="solid"/>
-            <a:tailEnd type="triangle"/>
-          </a:ln>
-        </p:spPr>
-      </p:sp>
-      <p:sp>
-        <p:nvSpPr>
-          <p:cNvPr id="36" name="Shape 27"/>
-          <p:cNvSpPr/>
-          <p:nvPr/>
-        </p:nvSpPr>
-        <p:spPr>
-          <a:xfrm>
-            <a:off x="6800850" y="2212848"/>
-            <a:ext cx="1885950" cy="731520"/>
-          </a:xfrm>
-          <a:prstGeom prst="roundRect">
-            <a:avLst>
-              <a:gd name="adj" fmla="val 10000"/>
-            </a:avLst>
-          </a:prstGeom>
-          <a:solidFill>
-            <a:srgbClr val="CFFAFE"/>
-          </a:solidFill>
-          <a:ln/>
-        </p:spPr>
-      </p:sp>
-      <p:sp>
-        <p:nvSpPr>
-          <p:cNvPr id="37" name="Shape 28"/>
-          <p:cNvSpPr/>
-          <p:nvPr/>
-        </p:nvSpPr>
-        <p:spPr>
-          <a:xfrm>
-            <a:off x="6910578" y="2404872"/>
-            <a:ext cx="347472" cy="347472"/>
-          </a:xfrm>
-          <a:prstGeom prst="ellipse">
-            <a:avLst/>
-          </a:prstGeom>
-          <a:solidFill>
-            <a:srgbClr val="0891B2"/>
-          </a:solidFill>
-          <a:ln/>
-        </p:spPr>
-      </p:sp>
-      <p:pic>
-        <p:nvPicPr>
-          <p:cNvPr id="38" name="Image 7" descr="preencoded.png">    </p:cNvPr>
-          <p:cNvPicPr>
-            <a:picLocks noChangeAspect="1"/>
-          </p:cNvPicPr>
-          <p:nvPr/>
-        </p:nvPicPr>
-        <p:blipFill>
-          <a:blip r:embed="rId8"/>
-          <a:stretch>
-            <a:fillRect/>
-          </a:stretch>
-        </p:blipFill>
-        <p:spPr>
-          <a:xfrm>
-            <a:off x="6993971" y="2488265"/>
-            <a:ext cx="180685" cy="180685"/>
-          </a:xfrm>
-          <a:prstGeom prst="rect">
-            <a:avLst/>
-          </a:prstGeom>
-        </p:spPr>
-      </p:pic>
-      <p:sp>
-        <p:nvSpPr>
-          <p:cNvPr id="39" name="Text 29"/>
-          <p:cNvSpPr txBox="1"/>
-          <p:nvPr/>
-        </p:nvSpPr>
-        <p:spPr>
-          <a:xfrm>
-            <a:off x="7367778" y="2258568"/>
-            <a:ext cx="1227582" cy="640080"/>
-          </a:xfrm>
-          <a:prstGeom prst="rect">
-            <a:avLst/>
-          </a:prstGeom>
-          <a:noFill/>
-          <a:ln/>
-        </p:spPr>
-        <p:txBody>
-          <a:bodyPr wrap="square" lIns="0" tIns="0" rIns="0" bIns="0" rtlCol="0" anchor="ctr"/>
-          <a:lstStyle/>
-          <a:p>
-            <a:pPr algn="l" indent="0" marL="0">
-              <a:buNone/>
-            </a:pPr>
-            <a:r>
-              <a:rPr lang="en-US" sz="1200" b="1" dirty="0">
-                <a:solidFill>
-                  <a:srgbClr val="1E1B4B"/>
-                </a:solidFill>
-                <a:latin typeface="Calibri" pitchFamily="34" charset="0"/>
-                <a:ea typeface="Calibri" pitchFamily="34" charset="-122"/>
-                <a:cs typeface="Calibri" pitchFamily="34" charset="-120"/>
-              </a:rPr>
-              <a:t>Contract</a:t>
-            </a:r>
-            <a:endParaRPr lang="en-US" sz="1200" dirty="0"/>
-          </a:p>
-          <a:p>
-            <a:pPr algn="l" indent="0" marL="0">
-              <a:buNone/>
-            </a:pPr>
-            <a:r>
-              <a:rPr lang="en-US" sz="1050" dirty="0">
-                <a:solidFill>
-                  <a:srgbClr val="1E1B4B"/>
-                </a:solidFill>
-                <a:latin typeface="Calibri" pitchFamily="34" charset="0"/>
-                <a:ea typeface="Calibri" pitchFamily="34" charset="-122"/>
-                <a:cs typeface="Calibri" pitchFamily="34" charset="-120"/>
-              </a:rPr>
-              <a:t>Expected within 30 to 45 days</a:t>
-            </a:r>
-            <a:endParaRPr lang="en-US" sz="1200" dirty="0"/>
-          </a:p>
-        </p:txBody>
-      </p:sp>
-      <p:sp>
-        <p:nvSpPr>
-          <p:cNvPr id="40" name="Text 30"/>
-          <p:cNvSpPr txBox="1"/>
-          <p:nvPr/>
-        </p:nvSpPr>
-        <p:spPr>
-          <a:xfrm>
-            <a:off x="457200" y="3090672"/>
-            <a:ext cx="3657600" cy="219456"/>
-          </a:xfrm>
-          <a:prstGeom prst="rect">
-            <a:avLst/>
-          </a:prstGeom>
-          <a:noFill/>
-          <a:ln/>
-        </p:spPr>
-        <p:txBody>
-          <a:bodyPr wrap="square" lIns="0" tIns="0" rIns="0" bIns="0" rtlCol="0" anchor="t"/>
-          <a:lstStyle/>
-          <a:p>
-            <a:pPr indent="0" marL="0">
-              <a:buNone/>
-            </a:pPr>
-            <a:r>
-              <a:rPr lang="en-US" sz="1150" b="1" dirty="0">
-                <a:solidFill>
-                  <a:srgbClr val="009A65"/>
-                </a:solidFill>
-                <a:latin typeface="Calibri" pitchFamily="34" charset="0"/>
-                <a:ea typeface="Calibri" pitchFamily="34" charset="-122"/>
-                <a:cs typeface="Calibri" pitchFamily="34" charset="-120"/>
-              </a:rPr>
-              <a:t>Two budgets, one agent</a:t>
-            </a:r>
-            <a:endParaRPr lang="en-US" sz="1150" dirty="0"/>
-          </a:p>
-        </p:txBody>
-      </p:sp>
-      <p:sp>
-        <p:nvSpPr>
-          <p:cNvPr id="41" name="Shape 31"/>
-          <p:cNvSpPr/>
-          <p:nvPr/>
-        </p:nvSpPr>
-        <p:spPr>
-          <a:xfrm>
-            <a:off x="457200" y="3337560"/>
-            <a:ext cx="2560320" cy="548640"/>
-          </a:xfrm>
-          <a:prstGeom prst="roundRect">
-            <a:avLst>
-              <a:gd name="adj" fmla="val 13333"/>
-            </a:avLst>
-          </a:prstGeom>
-          <a:solidFill>
-            <a:srgbClr val="CFFAFE"/>
-          </a:solidFill>
-          <a:ln/>
-        </p:spPr>
-      </p:sp>
-      <p:sp>
-        <p:nvSpPr>
-          <p:cNvPr id="42" name="Shape 32"/>
-          <p:cNvSpPr/>
-          <p:nvPr/>
-        </p:nvSpPr>
-        <p:spPr>
-          <a:xfrm>
-            <a:off x="566928" y="3474720"/>
-            <a:ext cx="274320" cy="274320"/>
-          </a:xfrm>
-          <a:prstGeom prst="ellipse">
-            <a:avLst/>
-          </a:prstGeom>
-          <a:solidFill>
-            <a:srgbClr val="0891B2"/>
-          </a:solidFill>
-          <a:ln/>
-        </p:spPr>
-      </p:sp>
-      <p:pic>
-        <p:nvPicPr>
-          <p:cNvPr id="43" name="Image 8" descr="preencoded.png">    </p:cNvPr>
-          <p:cNvPicPr>
-            <a:picLocks noChangeAspect="1"/>
-          </p:cNvPicPr>
-          <p:nvPr/>
-        </p:nvPicPr>
-        <p:blipFill>
-          <a:blip r:embed="rId9"/>
-          <a:stretch>
-            <a:fillRect/>
-          </a:stretch>
-        </p:blipFill>
-        <p:spPr>
-          <a:xfrm>
-            <a:off x="632765" y="3540557"/>
-            <a:ext cx="142646" cy="142646"/>
-          </a:xfrm>
-          <a:prstGeom prst="rect">
-            <a:avLst/>
-          </a:prstGeom>
-        </p:spPr>
-      </p:pic>
-      <p:sp>
-        <p:nvSpPr>
-          <p:cNvPr id="44" name="Text 33"/>
-          <p:cNvSpPr txBox="1"/>
-          <p:nvPr/>
-        </p:nvSpPr>
-        <p:spPr>
-          <a:xfrm>
-            <a:off x="950976" y="3383280"/>
-            <a:ext cx="1975104" cy="457200"/>
-          </a:xfrm>
-          <a:prstGeom prst="rect">
-            <a:avLst/>
-          </a:prstGeom>
-          <a:noFill/>
-          <a:ln/>
-        </p:spPr>
-        <p:txBody>
-          <a:bodyPr wrap="square" lIns="0" tIns="0" rIns="0" bIns="0" rtlCol="0" anchor="ctr"/>
-          <a:lstStyle/>
-          <a:p>
-            <a:pPr algn="l" indent="0" marL="0">
-              <a:buNone/>
-            </a:pPr>
-            <a:r>
-              <a:rPr lang="en-US" sz="1200" b="1" dirty="0">
-                <a:solidFill>
-                  <a:srgbClr val="1E1B4B"/>
-                </a:solidFill>
-                <a:latin typeface="Calibri" pitchFamily="34" charset="0"/>
-                <a:ea typeface="Calibri" pitchFamily="34" charset="-122"/>
-                <a:cs typeface="Calibri" pitchFamily="34" charset="-120"/>
-              </a:rPr>
-              <a:t>Security budget</a:t>
-            </a:r>
-            <a:endParaRPr lang="en-US" sz="1200" dirty="0"/>
-          </a:p>
-          <a:p>
-            <a:pPr algn="l" indent="0" marL="0">
-              <a:buNone/>
-            </a:pPr>
-            <a:r>
-              <a:rPr lang="en-US" sz="1050" dirty="0">
-                <a:solidFill>
-                  <a:srgbClr val="1E1B4B"/>
-                </a:solidFill>
-                <a:latin typeface="Calibri" pitchFamily="34" charset="0"/>
-                <a:ea typeface="Calibri" pitchFamily="34" charset="-122"/>
-                <a:cs typeface="Calibri" pitchFamily="34" charset="-120"/>
-              </a:rPr>
-              <a:t>CISO: threat detection</a:t>
-            </a:r>
-            <a:endParaRPr lang="en-US" sz="1200" dirty="0"/>
-          </a:p>
-        </p:txBody>
-      </p:sp>
-      <p:sp>
-        <p:nvSpPr>
-          <p:cNvPr id="45" name="Shape 34"/>
-          <p:cNvSpPr/>
-          <p:nvPr/>
-        </p:nvSpPr>
-        <p:spPr>
-          <a:xfrm>
-            <a:off x="457200" y="4023360"/>
-            <a:ext cx="2560320" cy="548640"/>
-          </a:xfrm>
-          <a:prstGeom prst="roundRect">
-            <a:avLst>
-              <a:gd name="adj" fmla="val 13333"/>
-            </a:avLst>
-          </a:prstGeom>
-          <a:solidFill>
-            <a:srgbClr val="FFEDD5"/>
-          </a:solidFill>
-          <a:ln/>
-        </p:spPr>
-      </p:sp>
-      <p:sp>
-        <p:nvSpPr>
-          <p:cNvPr id="46" name="Shape 35"/>
-          <p:cNvSpPr/>
-          <p:nvPr/>
-        </p:nvSpPr>
-        <p:spPr>
-          <a:xfrm>
-            <a:off x="566928" y="4160520"/>
-            <a:ext cx="274320" cy="274320"/>
-          </a:xfrm>
-          <a:prstGeom prst="ellipse">
-            <a:avLst/>
-          </a:prstGeom>
-          <a:solidFill>
-            <a:srgbClr val="EA580C"/>
-          </a:solidFill>
-          <a:ln/>
-        </p:spPr>
-      </p:sp>
-      <p:pic>
-        <p:nvPicPr>
-          <p:cNvPr id="47" name="Image 9" descr="preencoded.png">    </p:cNvPr>
-          <p:cNvPicPr>
-            <a:picLocks noChangeAspect="1"/>
-          </p:cNvPicPr>
-          <p:nvPr/>
-        </p:nvPicPr>
-        <p:blipFill>
-          <a:blip r:embed="rId10"/>
-          <a:stretch>
-            <a:fillRect/>
-          </a:stretch>
-        </p:blipFill>
-        <p:spPr>
-          <a:xfrm>
-            <a:off x="632765" y="4226357"/>
-            <a:ext cx="142646" cy="142646"/>
-          </a:xfrm>
-          <a:prstGeom prst="rect">
-            <a:avLst/>
-          </a:prstGeom>
-        </p:spPr>
-      </p:pic>
-      <p:sp>
-        <p:nvSpPr>
-          <p:cNvPr id="48" name="Text 36"/>
-          <p:cNvSpPr txBox="1"/>
-          <p:nvPr/>
-        </p:nvSpPr>
-        <p:spPr>
-          <a:xfrm>
-            <a:off x="950976" y="4069080"/>
-            <a:ext cx="1975104" cy="457200"/>
-          </a:xfrm>
-          <a:prstGeom prst="rect">
-            <a:avLst/>
-          </a:prstGeom>
-          <a:noFill/>
-          <a:ln/>
-        </p:spPr>
-        <p:txBody>
-          <a:bodyPr wrap="square" lIns="0" tIns="0" rIns="0" bIns="0" rtlCol="0" anchor="ctr"/>
-          <a:lstStyle/>
-          <a:p>
-            <a:pPr algn="l" indent="0" marL="0">
-              <a:buNone/>
-            </a:pPr>
-            <a:r>
-              <a:rPr lang="en-US" sz="1200" b="1" dirty="0">
-                <a:solidFill>
-                  <a:srgbClr val="1E1B4B"/>
-                </a:solidFill>
-                <a:latin typeface="Calibri" pitchFamily="34" charset="0"/>
-                <a:ea typeface="Calibri" pitchFamily="34" charset="-122"/>
-                <a:cs typeface="Calibri" pitchFamily="34" charset="-120"/>
-              </a:rPr>
-              <a:t>HR budget</a:t>
-            </a:r>
-            <a:endParaRPr lang="en-US" sz="1200" dirty="0"/>
-          </a:p>
-          <a:p>
-            <a:pPr algn="l" indent="0" marL="0">
-              <a:buNone/>
-            </a:pPr>
-            <a:r>
-              <a:rPr lang="en-US" sz="1050" dirty="0">
-                <a:solidFill>
-                  <a:srgbClr val="1E1B4B"/>
-                </a:solidFill>
-                <a:latin typeface="Calibri" pitchFamily="34" charset="0"/>
-                <a:ea typeface="Calibri" pitchFamily="34" charset="-122"/>
-                <a:cs typeface="Calibri" pitchFamily="34" charset="-120"/>
-              </a:rPr>
-              <a:t>Operations: work-time tracking</a:t>
-            </a:r>
-            <a:endParaRPr lang="en-US" sz="1200" dirty="0"/>
-          </a:p>
-        </p:txBody>
-      </p:sp>
-      <p:sp>
-        <p:nvSpPr>
-          <p:cNvPr id="49" name="Shape 37"/>
-          <p:cNvSpPr/>
-          <p:nvPr/>
-        </p:nvSpPr>
-        <p:spPr>
-          <a:xfrm>
-            <a:off x="3017520" y="3611880"/>
-            <a:ext cx="228600" cy="0"/>
-          </a:xfrm>
-          <a:prstGeom prst="line">
-            <a:avLst/>
-          </a:prstGeom>
-          <a:noFill/>
-          <a:ln w="22225">
-            <a:solidFill>
-              <a:srgbClr val="64748B"/>
-            </a:solidFill>
-            <a:prstDash val="solid"/>
-          </a:ln>
-        </p:spPr>
-      </p:sp>
-      <p:sp>
-        <p:nvSpPr>
-          <p:cNvPr id="50" name="Shape 38"/>
-          <p:cNvSpPr/>
-          <p:nvPr/>
-        </p:nvSpPr>
-        <p:spPr>
-          <a:xfrm>
-            <a:off x="3017520" y="4297680"/>
-            <a:ext cx="228600" cy="0"/>
-          </a:xfrm>
-          <a:prstGeom prst="line">
-            <a:avLst/>
-          </a:prstGeom>
-          <a:noFill/>
-          <a:ln w="22225">
-            <a:solidFill>
-              <a:srgbClr val="64748B"/>
-            </a:solidFill>
-            <a:prstDash val="solid"/>
-          </a:ln>
-        </p:spPr>
-      </p:sp>
-      <p:sp>
-        <p:nvSpPr>
-          <p:cNvPr id="51" name="Shape 39"/>
-          <p:cNvSpPr/>
-          <p:nvPr/>
-        </p:nvSpPr>
-        <p:spPr>
-          <a:xfrm>
-            <a:off x="3246120" y="3611880"/>
-            <a:ext cx="0" cy="685800"/>
-          </a:xfrm>
-          <a:prstGeom prst="line">
-            <a:avLst/>
-          </a:prstGeom>
-          <a:noFill/>
-          <a:ln w="22225">
-            <a:solidFill>
-              <a:srgbClr val="64748B"/>
-            </a:solidFill>
-            <a:prstDash val="solid"/>
-          </a:ln>
-        </p:spPr>
-      </p:sp>
-      <p:sp>
-        <p:nvSpPr>
-          <p:cNvPr id="52" name="Shape 40"/>
-          <p:cNvSpPr/>
-          <p:nvPr/>
-        </p:nvSpPr>
-        <p:spPr>
-          <a:xfrm>
-            <a:off x="3246120" y="3954780"/>
-            <a:ext cx="228600" cy="0"/>
-          </a:xfrm>
-          <a:prstGeom prst="line">
-            <a:avLst/>
-          </a:prstGeom>
-          <a:noFill/>
-          <a:ln w="22225">
-            <a:solidFill>
-              <a:srgbClr val="64748B"/>
-            </a:solidFill>
-            <a:prstDash val="solid"/>
-            <a:tailEnd type="triangle"/>
-          </a:ln>
-        </p:spPr>
-      </p:sp>
-      <p:sp>
-        <p:nvSpPr>
-          <p:cNvPr id="53" name="Shape 41"/>
-          <p:cNvSpPr/>
-          <p:nvPr/>
-        </p:nvSpPr>
-        <p:spPr>
-          <a:xfrm>
-            <a:off x="3474720" y="3566160"/>
-            <a:ext cx="2194560" cy="777240"/>
-          </a:xfrm>
-          <a:prstGeom prst="roundRect">
-            <a:avLst>
-              <a:gd name="adj" fmla="val 9412"/>
-            </a:avLst>
-          </a:prstGeom>
-          <a:solidFill>
-            <a:srgbClr val="009A65"/>
-          </a:solidFill>
-          <a:ln/>
-        </p:spPr>
-      </p:sp>
-      <p:sp>
-        <p:nvSpPr>
-          <p:cNvPr id="54" name="Shape 42"/>
-          <p:cNvSpPr/>
-          <p:nvPr/>
-        </p:nvSpPr>
-        <p:spPr>
-          <a:xfrm>
-            <a:off x="3584448" y="3790188"/>
-            <a:ext cx="329184" cy="329184"/>
-          </a:xfrm>
-          <a:prstGeom prst="ellipse">
-            <a:avLst/>
-          </a:prstGeom>
-          <a:solidFill>
-            <a:srgbClr val="FFFFFF"/>
-          </a:solidFill>
-          <a:ln/>
-        </p:spPr>
-      </p:sp>
-      <p:pic>
-        <p:nvPicPr>
-          <p:cNvPr id="55" name="Image 10" descr="preencoded.png">    </p:cNvPr>
-          <p:cNvPicPr>
-            <a:picLocks noChangeAspect="1"/>
-          </p:cNvPicPr>
-          <p:nvPr/>
-        </p:nvPicPr>
-        <p:blipFill>
-          <a:blip r:embed="rId11"/>
-          <a:stretch>
-            <a:fillRect/>
-          </a:stretch>
-        </p:blipFill>
-        <p:spPr>
-          <a:xfrm>
-            <a:off x="3663452" y="3869192"/>
-            <a:ext cx="171176" cy="171176"/>
-          </a:xfrm>
-          <a:prstGeom prst="rect">
-            <a:avLst/>
-          </a:prstGeom>
-        </p:spPr>
-      </p:pic>
-      <p:sp>
-        <p:nvSpPr>
-          <p:cNvPr id="56" name="Text 43"/>
-          <p:cNvSpPr txBox="1"/>
-          <p:nvPr/>
-        </p:nvSpPr>
-        <p:spPr>
-          <a:xfrm>
-            <a:off x="4023360" y="3611880"/>
-            <a:ext cx="1554480" cy="685800"/>
-          </a:xfrm>
-          <a:prstGeom prst="rect">
-            <a:avLst/>
-          </a:prstGeom>
-          <a:noFill/>
-          <a:ln/>
-        </p:spPr>
-        <p:txBody>
-          <a:bodyPr wrap="square" lIns="0" tIns="0" rIns="0" bIns="0" rtlCol="0" anchor="ctr"/>
-          <a:lstStyle/>
-          <a:p>
-            <a:pPr algn="l" indent="0" marL="0">
-              <a:buNone/>
-            </a:pPr>
-            <a:r>
-              <a:rPr lang="en-US" sz="1200" b="1" dirty="0">
-                <a:solidFill>
-                  <a:srgbClr val="FFFFFF"/>
-                </a:solidFill>
-                <a:latin typeface="Calibri" pitchFamily="34" charset="0"/>
-                <a:ea typeface="Calibri" pitchFamily="34" charset="-122"/>
-                <a:cs typeface="Calibri" pitchFamily="34" charset="-120"/>
-              </a:rPr>
-              <a:t>One tellTale agent</a:t>
-            </a:r>
-            <a:endParaRPr lang="en-US" sz="1200" dirty="0"/>
-          </a:p>
-          <a:p>
-            <a:pPr algn="l" indent="0" marL="0">
-              <a:buNone/>
-            </a:pPr>
-            <a:r>
-              <a:rPr lang="en-US" sz="1050" dirty="0">
-                <a:solidFill>
-                  <a:srgbClr val="FFFFFF"/>
-                </a:solidFill>
-                <a:latin typeface="Calibri" pitchFamily="34" charset="0"/>
-                <a:ea typeface="Calibri" pitchFamily="34" charset="-122"/>
-                <a:cs typeface="Calibri" pitchFamily="34" charset="-120"/>
-              </a:rPr>
-              <a:t>Serves both teams</a:t>
-            </a:r>
-            <a:endParaRPr lang="en-US" sz="1200" dirty="0"/>
-          </a:p>
-        </p:txBody>
-      </p:sp>
-      <p:sp>
-        <p:nvSpPr>
-          <p:cNvPr id="57" name="Shape 44"/>
-          <p:cNvSpPr/>
-          <p:nvPr/>
-        </p:nvSpPr>
-        <p:spPr>
-          <a:xfrm>
-            <a:off x="5687568" y="3954780"/>
-            <a:ext cx="210312" cy="0"/>
-          </a:xfrm>
-          <a:prstGeom prst="line">
-            <a:avLst/>
-          </a:prstGeom>
-          <a:noFill/>
-          <a:ln w="22225">
-            <a:solidFill>
-              <a:srgbClr val="64748B"/>
-            </a:solidFill>
-            <a:prstDash val="solid"/>
-            <a:tailEnd type="triangle"/>
-          </a:ln>
-        </p:spPr>
-      </p:sp>
-      <p:sp>
-        <p:nvSpPr>
-          <p:cNvPr id="58" name="Shape 45"/>
-          <p:cNvSpPr/>
-          <p:nvPr/>
-        </p:nvSpPr>
-        <p:spPr>
-          <a:xfrm>
-            <a:off x="5897880" y="3566160"/>
-            <a:ext cx="2788920" cy="777240"/>
-          </a:xfrm>
-          <a:prstGeom prst="roundRect">
-            <a:avLst>
-              <a:gd name="adj" fmla="val 9412"/>
-            </a:avLst>
-          </a:prstGeom>
-          <a:solidFill>
-            <a:srgbClr val="F1F5F9"/>
-          </a:solidFill>
-          <a:ln/>
-        </p:spPr>
-      </p:sp>
-      <p:sp>
-        <p:nvSpPr>
-          <p:cNvPr id="59" name="Shape 46"/>
-          <p:cNvSpPr/>
-          <p:nvPr/>
-        </p:nvSpPr>
-        <p:spPr>
-          <a:xfrm>
-            <a:off x="6007608" y="3808476"/>
-            <a:ext cx="292608" cy="292608"/>
-          </a:xfrm>
-          <a:prstGeom prst="ellipse">
-            <a:avLst/>
-          </a:prstGeom>
-          <a:solidFill>
-            <a:srgbClr val="475569"/>
-          </a:solidFill>
-          <a:ln/>
-        </p:spPr>
-      </p:sp>
-      <p:pic>
-        <p:nvPicPr>
-          <p:cNvPr id="60" name="Image 11" descr="preencoded.png">    </p:cNvPr>
-          <p:cNvPicPr>
-            <a:picLocks noChangeAspect="1"/>
-          </p:cNvPicPr>
-          <p:nvPr/>
-        </p:nvPicPr>
-        <p:blipFill>
-          <a:blip r:embed="rId12"/>
-          <a:stretch>
-            <a:fillRect/>
-          </a:stretch>
-        </p:blipFill>
-        <p:spPr>
-          <a:xfrm>
-            <a:off x="6077834" y="3878702"/>
-            <a:ext cx="152156" cy="152156"/>
-          </a:xfrm>
-          <a:prstGeom prst="rect">
-            <a:avLst/>
-          </a:prstGeom>
-        </p:spPr>
-      </p:pic>
-      <p:sp>
-        <p:nvSpPr>
-          <p:cNvPr id="61" name="Text 47"/>
-          <p:cNvSpPr txBox="1"/>
-          <p:nvPr/>
-        </p:nvSpPr>
-        <p:spPr>
-          <a:xfrm>
-            <a:off x="6409944" y="3611880"/>
-            <a:ext cx="2185416" cy="685800"/>
-          </a:xfrm>
-          <a:prstGeom prst="rect">
-            <a:avLst/>
-          </a:prstGeom>
-          <a:noFill/>
-          <a:ln/>
-        </p:spPr>
-        <p:txBody>
-          <a:bodyPr wrap="square" lIns="0" tIns="0" rIns="0" bIns="0" rtlCol="0" anchor="ctr"/>
-          <a:lstStyle/>
-          <a:p>
-            <a:pPr algn="l" indent="0" marL="0">
-              <a:buNone/>
-            </a:pPr>
-            <a:r>
-              <a:rPr lang="en-US" sz="1200" b="1" dirty="0">
-                <a:solidFill>
-                  <a:srgbClr val="1E1B4B"/>
-                </a:solidFill>
-                <a:latin typeface="Calibri" pitchFamily="34" charset="0"/>
-                <a:ea typeface="Calibri" pitchFamily="34" charset="-122"/>
-                <a:cs typeface="Calibri" pitchFamily="34" charset="-120"/>
-              </a:rPr>
-              <a:t>Harder to replace</a:t>
-            </a:r>
-            <a:endParaRPr lang="en-US" sz="1200" dirty="0"/>
-          </a:p>
-          <a:p>
-            <a:pPr algn="l" indent="0" marL="0">
-              <a:buNone/>
-            </a:pPr>
-            <a:r>
-              <a:rPr lang="en-US" sz="1050" dirty="0">
-                <a:solidFill>
-                  <a:srgbClr val="1E1B4B"/>
-                </a:solidFill>
-                <a:latin typeface="Calibri" pitchFamily="34" charset="0"/>
-                <a:ea typeface="Calibri" pitchFamily="34" charset="-122"/>
-                <a:cs typeface="Calibri" pitchFamily="34" charset="-120"/>
-              </a:rPr>
-              <a:t>Both teams would have to decide to leave</a:t>
-            </a:r>
-            <a:endParaRPr lang="en-US" sz="1200" dirty="0"/>
-          </a:p>
-        </p:txBody>
-      </p:sp>
-      <p:sp>
-        <p:nvSpPr>
-          <p:cNvPr id="62" name="Text 48"/>
-          <p:cNvSpPr txBox="1"/>
-          <p:nvPr/>
-        </p:nvSpPr>
-        <p:spPr>
-          <a:xfrm>
-            <a:off x="457200" y="4617720"/>
-            <a:ext cx="5486400" cy="182880"/>
-          </a:xfrm>
-          <a:prstGeom prst="rect">
-            <a:avLst/>
-          </a:prstGeom>
-          <a:noFill/>
-          <a:ln/>
-        </p:spPr>
-        <p:txBody>
-          <a:bodyPr wrap="square" lIns="0" tIns="0" rIns="0" bIns="0" rtlCol="0" anchor="t"/>
-          <a:lstStyle/>
-          <a:p>
-            <a:pPr indent="0" marL="0">
-              <a:buNone/>
-            </a:pPr>
-            <a:r>
-              <a:rPr lang="en-US" sz="950" i="1" dirty="0">
-                <a:solidFill>
-                  <a:srgbClr val="475569"/>
-                </a:solidFill>
-                <a:latin typeface="Calibri" pitchFamily="34" charset="0"/>
-                <a:ea typeface="Calibri" pitchFamily="34" charset="-122"/>
-                <a:cs typeface="Calibri" pitchFamily="34" charset="-120"/>
-              </a:rPr>
-              <a:t>Prices and timings are planning estimates.</a:t>
-            </a:r>
-            <a:endParaRPr lang="en-US" sz="950" dirty="0"/>
-          </a:p>
-        </p:txBody>
-      </p:sp>
-      <p:sp>
-        <p:nvSpPr>
-          <p:cNvPr id="25" name="Slide Number Placeholder 0"/>
-          <p:cNvSpPr>
-            <a:spLocks noGrp="1"/>
-          </p:cNvSpPr>
-          <p:nvPr>
-            <p:ph type="sldNum" sz="quarter" idx="4294967295"/>
-          </p:nvPr>
-        </p:nvSpPr>
-        <p:spPr>
-          <a:xfrm>
-            <a:off x="8366760" y="4800600"/>
-            <a:ext cx="320040" cy="201168"/>
-          </a:xfrm>
-          <a:prstGeom prst="rect">
-            <a:avLst/>
-          </a:prstGeom>
-          <a:extLst>
-            <a:ext uri="{C572A759-6A51-4108-AA02-DFA0A04FC94B}">
-              <ma14:wrappingTextBoxFlag xmlns:ma14="http://schemas.microsoft.com/office/mac/drawingml/2011/main" val="0"/>
-            </a:ext>
-          </a:extLst>
-        </p:spPr>
-        <p:txBody>
-          <a:bodyPr/>
-          <a:lstStyle>
-            <a:lvl1pPr>
-              <a:defRPr sz="900">
-                <a:solidFill>
-                  <a:srgbClr val="475569"/>
-                </a:solidFill>
-              </a:defRPr>
-            </a:lvl1pPr>
-          </a:lstStyle>
-          <a:p>
-            <a:pPr algn="l"/>
-            <a:fld id="{F7021451-1387-4CA6-816F-3879F97B5CBC}" type="slidenum">
-              <a:rPr b="0" lang="en-US"/>
-              <a:t>16</a:t>
             </a:fld>
             <a:endParaRPr lang="en-US"/>
           </a:p>
@@ -18586,7 +16578,7 @@
                 <a:ea typeface="Calibri" pitchFamily="34" charset="-122"/>
                 <a:cs typeface="Calibri" pitchFamily="34" charset="-120"/>
               </a:rPr>
-              <a:t>Metadata-only design that fits the DPDP Act</a:t>
+              <a:t>Collects only activity details, in line with the DPDP Act</a:t>
             </a:r>
             <a:endParaRPr lang="en-US" sz="1100" dirty="0"/>
           </a:p>
@@ -18686,7 +16678,7 @@
                 <a:ea typeface="Calibri" pitchFamily="34" charset="-122"/>
                 <a:cs typeface="Calibri" pitchFamily="34" charset="-120"/>
               </a:rPr>
-              <a:t>Now: hackathon build</a:t>
+              <a:t>Now: competition build</a:t>
             </a:r>
             <a:endParaRPr lang="en-US" sz="1150" dirty="0"/>
           </a:p>
@@ -18907,7 +16899,7 @@
                 <a:ea typeface="Calibri" pitchFamily="34" charset="-122"/>
                 <a:cs typeface="Calibri" pitchFamily="34" charset="-120"/>
               </a:rPr>
-              <a:t>Desktop agent, workforce part, SOC 2</a:t>
+              <a:t>Desktop app, workforce part, SOC 2 audit</a:t>
             </a:r>
             <a:endParaRPr lang="en-US" sz="1150" dirty="0"/>
           </a:p>
@@ -20675,7 +18667,7 @@
                   <a:schemeClr val="tx2"/>
                 </a:solidFill>
               </a:rPr>
-              <a:t>An example week for one engineer’s work account. Each step is allowed on its own.</a:t>
+              <a:t>One engineer’s work account over a week. Every single step is allowed on its own.</a:t>
             </a:r>
             <a:endParaRPr lang="en-US" sz="1350" dirty="0"/>
           </a:p>
@@ -20987,7 +18979,7 @@
                 <a:ea typeface="Calibri" pitchFamily="34" charset="-122"/>
                 <a:cs typeface="Calibri" pitchFamily="34" charset="-120"/>
               </a:rPr>
-              <a:t>Reads a runbook outside their role</a:t>
+              <a:t>Reads another team’s setup guide</a:t>
             </a:r>
             <a:endParaRPr lang="en-US" sz="1050" dirty="0"/>
           </a:p>
@@ -21912,7 +19904,7 @@
                 <a:ea typeface="Calibri" pitchFamily="34" charset="-122"/>
                 <a:cs typeface="Calibri" pitchFamily="34" charset="-120"/>
               </a:rPr>
-              <a:t>What tellTale looks for</a:t>
+              <a:t>What tellTale notices</a:t>
             </a:r>
             <a:endParaRPr lang="en-US" sz="1200" dirty="0"/>
           </a:p>
@@ -21929,7 +19921,7 @@
                 <a:ea typeface="Calibri" pitchFamily="34" charset="-122"/>
                 <a:cs typeface="Calibri" pitchFamily="34" charset="-120"/>
               </a:rPr>
-              <a:t>The change in direction from Monday to Thursday</a:t>
+              <a:t>The behaviour drifting from Tuesday onwards</a:t>
             </a:r>
             <a:endParaRPr lang="en-US" sz="1200" dirty="0"/>
           </a:p>
@@ -22090,7 +20082,7 @@
                 <a:ea typeface="Calibri" pitchFamily="34" charset="-122"/>
                 <a:cs typeface="Calibri" pitchFamily="34" charset="-120"/>
               </a:rPr>
-              <a:t>Promotions, transfers and 2am incidents look the same</a:t>
+              <a:t>New roles, team moves and 2 a.m. emergencies look similar</a:t>
             </a:r>
             <a:endParaRPr lang="en-US" sz="1200" dirty="0"/>
           </a:p>
@@ -22236,7 +20228,7 @@
                 <a:ea typeface="Calibri" pitchFamily="34" charset="-122"/>
                 <a:cs typeface="Calibri" pitchFamily="34" charset="-120"/>
               </a:rPr>
-              <a:t>Five files a night for 60 days never crosses a fixed daily limit</a:t>
+              <a:t>Taking five files a night for 60 days never hits a daily limit</a:t>
             </a:r>
             <a:endParaRPr lang="en-US" sz="1200" dirty="0"/>
           </a:p>
@@ -22382,7 +20374,7 @@
                 <a:ea typeface="Calibri" pitchFamily="34" charset="-122"/>
                 <a:cs typeface="Calibri" pitchFamily="34" charset="-120"/>
               </a:rPr>
-              <a:t>Security staff report 2 to 4 hours to investigate a single alert</a:t>
+              <a:t>Analysts report spending 2 to 4 hours on a single alert</a:t>
             </a:r>
             <a:endParaRPr lang="en-US" sz="1200" dirty="0"/>
           </a:p>
@@ -22570,7 +20562,7 @@
                   <a:schemeClr val="tx2"/>
                 </a:solidFill>
               </a:rPr>
-              <a:t>Three gaps lead to muted alerts. Each gap maps to a tellTale fix below it.</a:t>
+              <a:t>Three gaps make teams ignore alerts. Under each gap is how tellTale fixes it.</a:t>
             </a:r>
             <a:endParaRPr lang="en-US" sz="1350" dirty="0"/>
           </a:p>
@@ -22714,7 +20706,7 @@
                 <a:ea typeface="Calibri" pitchFamily="34" charset="-122"/>
                 <a:cs typeface="Calibri" pitchFamily="34" charset="-120"/>
               </a:rPr>
-              <a:t>Fixed limits miss order and slow build-up</a:t>
+              <a:t>Fixed limits miss step order and slow theft</a:t>
             </a:r>
             <a:endParaRPr lang="en-US" sz="1050" dirty="0"/>
           </a:p>
@@ -22843,7 +20835,7 @@
                 <a:ea typeface="Calibri" pitchFamily="34" charset="-122"/>
                 <a:cs typeface="Calibri" pitchFamily="34" charset="-120"/>
               </a:rPr>
-              <a:t>No business context</a:t>
+              <a:t>Can’t see approvals</a:t>
             </a:r>
             <a:endParaRPr lang="en-US" sz="1200" dirty="0"/>
           </a:p>
@@ -23179,7 +21171,7 @@
                 <a:ea typeface="Calibri" pitchFamily="34" charset="-122"/>
                 <a:cs typeface="Calibri" pitchFamily="34" charset="-120"/>
               </a:rPr>
-              <a:t>Alerts get muted</a:t>
+              <a:t>Alerts get ignored</a:t>
             </a:r>
             <a:endParaRPr lang="en-US" sz="1200" dirty="0"/>
           </a:p>
@@ -23347,7 +21339,7 @@
                 <a:ea typeface="Calibri" pitchFamily="34" charset="-122"/>
                 <a:cs typeface="Calibri" pitchFamily="34" charset="-120"/>
               </a:rPr>
-              <a:t>Fix: order and drift</a:t>
+              <a:t>Fix: look at patterns</a:t>
             </a:r>
             <a:endParaRPr lang="en-US" sz="1200" dirty="0"/>
           </a:p>
@@ -23386,7 +21378,7 @@
                 <a:ea typeface="Calibri" pitchFamily="34" charset="-122"/>
                 <a:cs typeface="Calibri" pitchFamily="34" charset="-120"/>
               </a:rPr>
-              <a:t>Scores sequences and compares with a frozen earlier snapshot</a:t>
+              <a:t>Scores step order and slow change over weeks</a:t>
             </a:r>
             <a:endParaRPr lang="en-US" sz="1050" dirty="0"/>
           </a:p>
@@ -24019,7 +22011,7 @@
                 <a:ea typeface="Calibri" pitchFamily="34" charset="-122"/>
                 <a:cs typeface="Calibri" pitchFamily="34" charset="-120"/>
               </a:rPr>
-              <a:t>Our target: remove at least half of a basic tool’s false alarms while still catching 90% of attacks</a:t>
+              <a:t>Goal, not yet measured: half a basic tool’s false alarms, while still catching 90% of attacks</a:t>
             </a:r>
             <a:endParaRPr lang="en-US" sz="1150" dirty="0"/>
           </a:p>
@@ -24168,7 +22160,7 @@
                   <a:schemeClr val="tx2"/>
                 </a:solidFill>
               </a:rPr>
-              <a:t>The market is not empty. These are the main products and the gap each one leaves.</a:t>
+              <a:t>There are already products in this space. Here is where each one falls short.</a:t>
             </a:r>
             <a:endParaRPr lang="en-US" sz="1350" dirty="0"/>
           </a:p>
@@ -24475,7 +22467,7 @@
                 <a:ea typeface="Calibri" pitchFamily="34" charset="-122"/>
                 <a:cs typeface="Calibri" pitchFamily="34" charset="-120"/>
               </a:rPr>
-              <a:t>Strong inside Microsoft 365, thin on GitHub and AWS</a:t>
+              <a:t>Strong in Microsoft 365, weak on GitHub and AWS</a:t>
             </a:r>
             <a:endParaRPr lang="en-US" sz="1050" dirty="0"/>
           </a:p>
@@ -24750,7 +22742,7 @@
                 <a:ea typeface="Calibri" pitchFamily="34" charset="-122"/>
                 <a:cs typeface="Calibri" pitchFamily="34" charset="-120"/>
               </a:rPr>
-              <a:t>Log-heavy setup, often 45 to 90 days before useful</a:t>
+              <a:t>Heavy setup; often 45 to 90 days before it is useful</a:t>
             </a:r>
             <a:endParaRPr lang="en-US" sz="1050" dirty="0"/>
           </a:p>
@@ -24835,7 +22827,7 @@
                 <a:ea typeface="Calibri" pitchFamily="34" charset="-122"/>
                 <a:cs typeface="Calibri" pitchFamily="34" charset="-120"/>
               </a:rPr>
-              <a:t>Learns from 90 days of existing history on day one</a:t>
+              <a:t>Learns from 90 days of past logs on day one</a:t>
             </a:r>
             <a:endParaRPr lang="en-US" sz="1050" dirty="0"/>
           </a:p>
@@ -25025,7 +23017,7 @@
                 <a:ea typeface="Calibri" pitchFamily="34" charset="-122"/>
                 <a:cs typeface="Calibri" pitchFamily="34" charset="-120"/>
               </a:rPr>
-              <a:t>Need an agent installed on every laptop first</a:t>
+              <a:t>Need software installed on every laptop first</a:t>
             </a:r>
             <a:endParaRPr lang="en-US" sz="1050" dirty="0"/>
           </a:p>
@@ -25110,7 +23102,7 @@
                 <a:ea typeface="Calibri" pitchFamily="34" charset="-122"/>
                 <a:cs typeface="Calibri" pitchFamily="34" charset="-120"/>
               </a:rPr>
-              <a:t>Security part works with no agent at all</a:t>
+              <a:t>Security part needs no laptop software at all</a:t>
             </a:r>
             <a:endParaRPr lang="en-US" sz="1050" dirty="0"/>
           </a:p>
@@ -25660,7 +23652,7 @@
                 <a:ea typeface="Calibri" pitchFamily="34" charset="-122"/>
                 <a:cs typeface="Calibri" pitchFamily="34" charset="-120"/>
               </a:rPr>
-              <a:t>Work time and threat detection from one agent</a:t>
+              <a:t>Work time and threat detection from one app</a:t>
             </a:r>
             <a:endParaRPr lang="en-US" sz="1050" dirty="0"/>
           </a:p>
@@ -25850,7 +23842,7 @@
                 <a:ea typeface="Calibri" pitchFamily="34" charset="-122"/>
                 <a:cs typeface="Calibri" pitchFamily="34" charset="-120"/>
               </a:rPr>
-              <a:t>Deep on file permissions, limited on identity</a:t>
+              <a:t>Strong on file permissions, weaker on accounts</a:t>
             </a:r>
             <a:endParaRPr lang="en-US" sz="1050" dirty="0"/>
           </a:p>
@@ -25974,7 +23966,7 @@
                 <a:ea typeface="Calibri" pitchFamily="34" charset="-122"/>
                 <a:cs typeface="Calibri" pitchFamily="34" charset="-120"/>
               </a:rPr>
-              <a:t>Based on vendor documentation and practitioner reports; time-to-value figures are estimates.</a:t>
+              <a:t>Based on vendor documentation and practitioner reports; setup times are estimates.</a:t>
             </a:r>
             <a:endParaRPr lang="en-US" sz="950" dirty="0"/>
           </a:p>
@@ -26123,7 +24115,7 @@
                   <a:schemeClr val="tx2"/>
                 </a:solidFill>
               </a:rPr>
-              <a:t>One system with two parts. They share data but are kept apart.</a:t>
+              <a:t>One system with two parts that share data but are kept apart.</a:t>
             </a:r>
             <a:endParaRPr lang="en-US" sz="1350" dirty="0"/>
           </a:p>
@@ -26540,7 +24532,7 @@
                 <a:ea typeface="Calibri" pitchFamily="34" charset="-122"/>
                 <a:cs typeface="Calibri" pitchFamily="34" charset="-120"/>
               </a:rPr>
-              <a:t>Desktop agent (optional)</a:t>
+              <a:t>Desktop app (optional)</a:t>
             </a:r>
             <a:endParaRPr lang="en-US" sz="1200" dirty="0"/>
           </a:p>
@@ -26557,7 +24549,7 @@
                 <a:ea typeface="Calibri" pitchFamily="34" charset="-122"/>
                 <a:cs typeface="Calibri" pitchFamily="34" charset="-120"/>
               </a:rPr>
-              <a:t>Active and idle time, apps, files</a:t>
+              <a:t>Active and idle time, apps, file activity</a:t>
             </a:r>
             <a:endParaRPr lang="en-US" sz="1200" dirty="0"/>
           </a:p>
@@ -26725,7 +24717,7 @@
                 <a:ea typeface="Calibri" pitchFamily="34" charset="-122"/>
                 <a:cs typeface="Calibri" pitchFamily="34" charset="-120"/>
               </a:rPr>
-              <a:t>Collects events, turns them into one format, replaces names with IDs and keeps everything in one database</a:t>
+              <a:t>Collects activity, puts it in one common format, swaps names for ID numbers and stores it all in one database</a:t>
             </a:r>
             <a:endParaRPr lang="en-US" sz="1100" dirty="0"/>
           </a:p>
@@ -26895,7 +24887,7 @@
                 <a:ea typeface="Calibri" pitchFamily="34" charset="-122"/>
                 <a:cs typeface="Calibri" pitchFamily="34" charset="-120"/>
               </a:rPr>
-              <a:t>For the security team: spots risky behaviour changes and ranks them into cases with evidence</a:t>
+              <a:t>For the security team: finds risky changes in behaviour and turns them into ranked cases with evidence</a:t>
             </a:r>
             <a:endParaRPr lang="en-US" sz="1200" dirty="0"/>
           </a:p>
@@ -27163,7 +25155,7 @@
                 <a:ea typeface="Calibri" pitchFamily="34" charset="-122"/>
                 <a:cs typeface="Calibri" pitchFamily="34" charset="-120"/>
               </a:rPr>
-              <a:t>HR never sees risk scores. Security never sees productivity.</a:t>
+              <a:t>HR never sees risk scores. Security never sees names or productivity.</a:t>
             </a:r>
             <a:endParaRPr lang="en-US" sz="1200" dirty="0"/>
           </a:p>
@@ -27578,7 +25570,7 @@
                   <a:schemeClr val="tx2"/>
                 </a:solidFill>
               </a:rPr>
-              <a:t>Every action passes four steps before anyone is alerted.</a:t>
+              <a:t>Every action goes through four steps before anyone is alerted.</a:t>
             </a:r>
             <a:endParaRPr lang="en-US" sz="1350" dirty="0"/>
           </a:p>
@@ -27890,7 +25882,7 @@
                 <a:ea typeface="Calibri" pitchFamily="34" charset="-122"/>
                 <a:cs typeface="Calibri" pitchFamily="34" charset="-120"/>
               </a:rPr>
-              <a:t>Compared with own past, usual order and teammates</a:t>
+              <a:t>Compared with its own past and with teammates</a:t>
             </a:r>
             <a:endParaRPr lang="en-US" sz="1050" dirty="0"/>
           </a:p>
@@ -28226,7 +26218,7 @@
                 <a:ea typeface="Calibri" pitchFamily="34" charset="-122"/>
                 <a:cs typeface="Calibri" pitchFamily="34" charset="-120"/>
               </a:rPr>
-              <a:t>A probability, weighted by how valuable the system is</a:t>
+              <a:t>A score, weighted by how important the system is</a:t>
             </a:r>
             <a:endParaRPr lang="en-US" sz="1050" dirty="0"/>
           </a:p>
@@ -28394,7 +26386,7 @@
                 <a:ea typeface="Calibri" pitchFamily="34" charset="-122"/>
                 <a:cs typeface="Calibri" pitchFamily="34" charset="-120"/>
               </a:rPr>
-              <a:t>Case file and AI assistant; a person makes the call</a:t>
+              <a:t>Case file and AI assistant; a person decides</a:t>
             </a:r>
             <a:endParaRPr lang="en-US" sz="1050" dirty="0"/>
           </a:p>
@@ -28540,7 +26532,7 @@
                 <a:ea typeface="Calibri" pitchFamily="34" charset="-122"/>
                 <a:cs typeface="Calibri" pitchFamily="34" charset="-120"/>
               </a:rPr>
-              <a:t>Logged for audit, no alert raised</a:t>
+              <a:t>Saved for audit; no alert raised</a:t>
             </a:r>
             <a:endParaRPr lang="en-US" sz="1200" dirty="0"/>
           </a:p>
@@ -28847,7 +26839,7 @@
                 <a:ea typeface="Calibri" pitchFamily="34" charset="-122"/>
                 <a:cs typeface="Calibri" pitchFamily="34" charset="-120"/>
               </a:rPr>
-              <a:t>Data arrives every 1 to 5 minutes; scoring takes under a millisecond</a:t>
+              <a:t>New data every 1 to 5 minutes; scoring takes under a millisecond</a:t>
             </a:r>
             <a:endParaRPr lang="en-US" sz="1200" dirty="0"/>
           </a:p>
@@ -28969,7 +26961,7 @@
                 <a:ea typeface="Calibri" pitchFamily="34" charset="-122"/>
                 <a:cs typeface="Calibri" pitchFamily="34" charset="-120"/>
               </a:rPr>
-              <a:t>Related signals become one case per account, not six alerts</a:t>
+              <a:t>Related warnings become one case per account, not six alerts</a:t>
             </a:r>
             <a:endParaRPr lang="en-US" sz="1200" dirty="0"/>
           </a:p>
@@ -29240,7 +27232,7 @@
                   <a:schemeClr val="tx2"/>
                 </a:solidFill>
               </a:rPr>
-              <a:t>Three independent checks, each catching a different kind of attack, plus extra inputs.</a:t>
+              <a:t>Three separate checks, each catching a different kind of attack, plus three extra signals.</a:t>
             </a:r>
             <a:endParaRPr lang="en-US" sz="1350" dirty="0"/>
           </a:p>
@@ -29554,7 +27546,7 @@
                 <a:ea typeface="Calibri" pitchFamily="34" charset="-122"/>
                 <a:cs typeface="Calibri" pitchFamily="34" charset="-120"/>
               </a:rPr>
-              <a:t>Volume against the person’s own normal days, using medians so one busy day doesn’t skew it</a:t>
+              <a:t>Compared with the person’s own normal days; one busy day can’t skew it</a:t>
             </a:r>
             <a:endParaRPr lang="en-US" sz="1200" dirty="0"/>
           </a:p>
@@ -29892,7 +27884,7 @@
                 <a:ea typeface="Calibri" pitchFamily="34" charset="-122"/>
                 <a:cs typeface="Calibri" pitchFamily="34" charset="-120"/>
               </a:rPr>
-              <a:t>Compared with a frozen earlier snapshot and with peers, so slow change still shows</a:t>
+              <a:t>Compared with teammates and with a snapshot from months ago</a:t>
             </a:r>
             <a:endParaRPr lang="en-US" sz="1200" dirty="0"/>
           </a:p>
@@ -30213,7 +28205,7 @@
                 <a:ea typeface="Calibri" pitchFamily="34" charset="-122"/>
                 <a:cs typeface="Calibri" pitchFamily="34" charset="-120"/>
               </a:rPr>
-              <a:t>Decoy files no honest user opens</a:t>
+              <a:t>Decoy files that no honest user opens</a:t>
             </a:r>
             <a:endParaRPr lang="en-US" sz="1050" dirty="0"/>
           </a:p>
@@ -30318,7 +28310,7 @@
                 <a:ea typeface="Calibri" pitchFamily="34" charset="-122"/>
                 <a:cs typeface="Calibri" pitchFamily="34" charset="-120"/>
               </a:rPr>
-              <a:t>Changes in who talks to whom</a:t>
+              <a:t>New contacts outside the company</a:t>
             </a:r>
             <a:endParaRPr lang="en-US" sz="1050" dirty="0"/>
           </a:p>
@@ -30423,7 +28415,7 @@
                 <a:ea typeface="Calibri" pitchFamily="34" charset="-122"/>
                 <a:cs typeface="Calibri" pitchFamily="34" charset="-120"/>
               </a:rPr>
-              <a:t>New joiners vs role peers</a:t>
+              <a:t>New joiners compared with their peers</a:t>
             </a:r>
             <a:endParaRPr lang="en-US" sz="1050" dirty="0"/>
           </a:p>
@@ -30927,7 +28919,7 @@
                   <a:schemeClr val="tx2"/>
                 </a:solidFill>
               </a:rPr>
-              <a:t>Most unusual activity is real work, so tellTale checks the records and checks they are genuine.</a:t>
+              <a:t>Most unusual activity is real work, so tellTale looks for an approval and checks it is genuine.</a:t>
             </a:r>
             <a:endParaRPr lang="en-US" sz="1350" dirty="0"/>
           </a:p>
@@ -31503,7 +29495,7 @@
                 <a:ea typeface="Calibri" pitchFamily="34" charset="-122"/>
                 <a:cs typeface="Calibri" pitchFamily="34" charset="-120"/>
               </a:rPr>
-              <a:t>Someone else assigned it?</a:t>
+              <a:t>Made by someone else?</a:t>
             </a:r>
             <a:endParaRPr lang="en-US" sz="1150" dirty="0"/>
           </a:p>
@@ -31542,7 +29534,7 @@
                 <a:ea typeface="Calibri" pitchFamily="34" charset="-122"/>
                 <a:cs typeface="Calibri" pitchFamily="34" charset="-120"/>
               </a:rPr>
-              <a:t>Self-assigned work counts for little or nothing</a:t>
+              <a:t>A ticket you wrote for yourself doesn’t count</a:t>
             </a:r>
             <a:endParaRPr lang="en-US" sz="1050" dirty="0"/>
           </a:p>
@@ -32094,7 +30086,7 @@
                 <a:ea typeface="Calibri" pitchFamily="34" charset="-122"/>
                 <a:cs typeface="Calibri" pitchFamily="34" charset="-120"/>
               </a:rPr>
-              <a:t>Risk lowered and the reason logged</a:t>
+              <a:t>Score lowered and the reason saved</a:t>
             </a:r>
             <a:endParaRPr lang="en-US" sz="1200" dirty="0"/>
           </a:p>
@@ -32199,7 +30191,7 @@
                 <a:ea typeface="Calibri" pitchFamily="34" charset="-122"/>
                 <a:cs typeface="Calibri" pitchFamily="34" charset="-120"/>
               </a:rPr>
-              <a:t>Missing or faked</a:t>
+              <a:t>Missing or fake</a:t>
             </a:r>
             <a:endParaRPr lang="en-US" sz="1200" dirty="0"/>
           </a:p>
@@ -32216,7 +30208,7 @@
                 <a:ea typeface="Calibri" pitchFamily="34" charset="-122"/>
                 <a:cs typeface="Calibri" pitchFamily="34" charset="-120"/>
               </a:rPr>
-              <a:t>Faking a ticket raises its own alarm</a:t>
+              <a:t>A fake ticket raises the score</a:t>
             </a:r>
             <a:endParaRPr lang="en-US" sz="1200" dirty="0"/>
           </a:p>
@@ -32360,7 +30352,7 @@
                 <a:ea typeface="Calibri" pitchFamily="34" charset="-122"/>
                 <a:cs typeface="Calibri" pitchFamily="34" charset="-120"/>
               </a:rPr>
-              <a:t>Every lowered score is logged with its reason</a:t>
+              <a:t>Every lowered score is saved with its reason</a:t>
             </a:r>
             <a:endParaRPr lang="en-US" sz="1100" dirty="0"/>
           </a:p>
@@ -32570,7 +30562,7 @@
                 <a:ea typeface="Calibri" pitchFamily="34" charset="-122"/>
                 <a:cs typeface="Calibri" pitchFamily="34" charset="-120"/>
               </a:rPr>
-              <a:t>A decoy file hit is never lowered</a:t>
+              <a:t>Touching a decoy is never excused</a:t>
             </a:r>
             <a:endParaRPr lang="en-US" sz="1100" dirty="0"/>
           </a:p>
@@ -33016,7 +31008,7 @@
                 <a:ea typeface="Calibri" pitchFamily="34" charset="-122"/>
                 <a:cs typeface="Calibri" pitchFamily="34" charset="-120"/>
               </a:rPr>
-              <a:t>Copied the code, then opened a normal code review</a:t>
+              <a:t>Copied the code, then asked teammates to review a change</a:t>
             </a:r>
             <a:endParaRPr lang="en-US" sz="1200" dirty="0"/>
           </a:p>
@@ -33369,7 +31361,7 @@
                 <a:ea typeface="Calibri" pitchFamily="34" charset="-122"/>
                 <a:cs typeface="Calibri" pitchFamily="34" charset="-120"/>
               </a:rPr>
-              <a:t>Raises a false alarm, about 45 minutes wasted</a:t>
+              <a:t>Raises a false alarm someone must check by hand</a:t>
             </a:r>
             <a:endParaRPr lang="en-US" sz="1200" dirty="0"/>
           </a:p>
@@ -33515,7 +31507,7 @@
                 <a:ea typeface="Calibri" pitchFamily="34" charset="-122"/>
                 <a:cs typeface="Calibri" pitchFamily="34" charset="-120"/>
               </a:rPr>
-              <a:t>Logged in from an unknown VPN and sent the code outside</a:t>
+              <a:t>Logged in at 1 a.m. from an unknown VPN and sent the code outside</a:t>
             </a:r>
             <a:endParaRPr lang="en-US" sz="1200" dirty="0"/>
           </a:p>
@@ -34160,7 +32152,7 @@
                 <a:ea typeface="Calibri" pitchFamily="34" charset="-122"/>
                 <a:cs typeface="Calibri" pitchFamily="34" charset="-120"/>
               </a:rPr>
-              <a:t>Ticket self-assigned 40 minutes before</a:t>
+              <a:t>Wrote their own ticket 40 minutes before</a:t>
             </a:r>
             <a:endParaRPr lang="en-US" sz="1200" dirty="0"/>
           </a:p>
@@ -34367,7 +32359,7 @@
                 <a:ea typeface="Calibri" pitchFamily="34" charset="-122"/>
                 <a:cs typeface="Calibri" pitchFamily="34" charset="-120"/>
               </a:rPr>
-              <a:t>Stays silent: a ticket exists and volume looks normal</a:t>
+              <a:t>Stays silent: a ticket exists and the amount looks normal</a:t>
             </a:r>
             <a:endParaRPr lang="en-US" sz="1200" dirty="0"/>
           </a:p>

--- a/tellTale_CyberForge_Deck.pptx
+++ b/tellTale_CyberForge_Deck.pptx
@@ -6023,7 +6023,7 @@
       </p:sp>
       <p:sp>
         <p:nvSpPr>
-          <p:cNvPr id="25" name="Slide Number Placeholder 0"/>
+          <p:cNvPr id="76" name="Slide Number Placeholder 0"/>
           <p:cNvSpPr>
             <a:spLocks noGrp="1"/>
           </p:cNvSpPr>
@@ -7854,7 +7854,7 @@
       </p:sp>
       <p:sp>
         <p:nvSpPr>
-          <p:cNvPr id="25" name="Slide Number Placeholder 0"/>
+          <p:cNvPr id="61" name="Slide Number Placeholder 0"/>
           <p:cNvSpPr>
             <a:spLocks noGrp="1"/>
           </p:cNvSpPr>
@@ -9509,7 +9509,7 @@
       </p:sp>
       <p:sp>
         <p:nvSpPr>
-          <p:cNvPr id="25" name="Slide Number Placeholder 0"/>
+          <p:cNvPr id="62" name="Slide Number Placeholder 0"/>
           <p:cNvSpPr>
             <a:spLocks noGrp="1"/>
           </p:cNvSpPr>
@@ -11554,7 +11554,7 @@
       </p:sp>
       <p:sp>
         <p:nvSpPr>
-          <p:cNvPr id="25" name="Slide Number Placeholder 0"/>
+          <p:cNvPr id="66" name="Slide Number Placeholder 0"/>
           <p:cNvSpPr>
             <a:spLocks noGrp="1"/>
           </p:cNvSpPr>
@@ -13575,7 +13575,7 @@
       </p:sp>
       <p:sp>
         <p:nvSpPr>
-          <p:cNvPr id="25" name="Slide Number Placeholder 0"/>
+          <p:cNvPr id="76" name="Slide Number Placeholder 0"/>
           <p:cNvSpPr>
             <a:spLocks noGrp="1"/>
           </p:cNvSpPr>
@@ -15743,7 +15743,7 @@
       </p:sp>
       <p:sp>
         <p:nvSpPr>
-          <p:cNvPr id="25" name="Slide Number Placeholder 0"/>
+          <p:cNvPr id="74" name="Slide Number Placeholder 0"/>
           <p:cNvSpPr>
             <a:spLocks noGrp="1"/>
           </p:cNvSpPr>
@@ -15794,7 +15794,7 @@
 </p:sld>
 </file>
 
-<file path=ppt/slides/slide17.xml><?xml version="1.0" encoding="utf-8"?>
+<file path=ppt/slides/slide16.xml><?xml version="1.0" encoding="utf-8"?>
 <p:sld xmlns:a="http://schemas.openxmlformats.org/drawingml/2006/main" xmlns:r="http://schemas.openxmlformats.org/officeDocument/2006/relationships" xmlns:p="http://schemas.openxmlformats.org/presentationml/2006/main">
   <p:cSld name="Slide 17">
     <p:spTree>
@@ -17048,7 +17048,7 @@
       </p:sp>
       <p:sp>
         <p:nvSpPr>
-          <p:cNvPr id="25" name="Slide Number Placeholder 0"/>
+          <p:cNvPr id="42" name="Slide Number Placeholder 0"/>
           <p:cNvSpPr>
             <a:spLocks noGrp="1"/>
           </p:cNvSpPr>
@@ -17099,7 +17099,7 @@
 </p:sld>
 </file>
 
-<file path=ppt/slides/slide18.xml><?xml version="1.0" encoding="utf-8"?>
+<file path=ppt/slides/slide17.xml><?xml version="1.0" encoding="utf-8"?>
 <p:sld xmlns:a="http://schemas.openxmlformats.org/drawingml/2006/main" xmlns:r="http://schemas.openxmlformats.org/officeDocument/2006/relationships" xmlns:p="http://schemas.openxmlformats.org/presentationml/2006/main">
   <p:cSld name="Slide 18">
     <p:spTree>
@@ -18526,7 +18526,7 @@
       </p:sp>
       <p:sp>
         <p:nvSpPr>
-          <p:cNvPr id="25" name="Slide Number Placeholder 0"/>
+          <p:cNvPr id="53" name="Slide Number Placeholder 0"/>
           <p:cNvSpPr>
             <a:spLocks noGrp="1"/>
           </p:cNvSpPr>
@@ -20421,7 +20421,7 @@
       </p:sp>
       <p:sp>
         <p:nvSpPr>
-          <p:cNvPr id="25" name="Slide Number Placeholder 0"/>
+          <p:cNvPr id="64" name="Slide Number Placeholder 0"/>
           <p:cNvSpPr>
             <a:spLocks noGrp="1"/>
           </p:cNvSpPr>
@@ -22019,7 +22019,7 @@
       </p:sp>
       <p:sp>
         <p:nvSpPr>
-          <p:cNvPr id="25" name="Slide Number Placeholder 0"/>
+          <p:cNvPr id="56" name="Slide Number Placeholder 0"/>
           <p:cNvSpPr>
             <a:spLocks noGrp="1"/>
           </p:cNvSpPr>
@@ -23974,7 +23974,7 @@
       </p:sp>
       <p:sp>
         <p:nvSpPr>
-          <p:cNvPr id="25" name="Slide Number Placeholder 0"/>
+          <p:cNvPr id="68" name="Slide Number Placeholder 0"/>
           <p:cNvSpPr>
             <a:spLocks noGrp="1"/>
           </p:cNvSpPr>
@@ -25285,7 +25285,7 @@
       </p:sp>
       <p:sp>
         <p:nvSpPr>
-          <p:cNvPr id="25" name="Slide Number Placeholder 0"/>
+          <p:cNvPr id="49" name="Slide Number Placeholder 0"/>
           <p:cNvSpPr>
             <a:spLocks noGrp="1"/>
           </p:cNvSpPr>
@@ -27091,7 +27091,7 @@
       </p:sp>
       <p:sp>
         <p:nvSpPr>
-          <p:cNvPr id="25" name="Slide Number Placeholder 0"/>
+          <p:cNvPr id="56" name="Slide Number Placeholder 0"/>
           <p:cNvSpPr>
             <a:spLocks noGrp="1"/>
           </p:cNvSpPr>
@@ -28778,7 +28778,7 @@
       </p:sp>
       <p:sp>
         <p:nvSpPr>
-          <p:cNvPr id="25" name="Slide Number Placeholder 0"/>
+          <p:cNvPr id="59" name="Slide Number Placeholder 0"/>
           <p:cNvSpPr>
             <a:spLocks noGrp="1"/>
           </p:cNvSpPr>
@@ -30570,7 +30570,7 @@
       </p:sp>
       <p:sp>
         <p:nvSpPr>
-          <p:cNvPr id="25" name="Slide Number Placeholder 0"/>
+          <p:cNvPr id="64" name="Slide Number Placeholder 0"/>
           <p:cNvSpPr>
             <a:spLocks noGrp="1"/>
           </p:cNvSpPr>
@@ -32406,7 +32406,7 @@
       </p:sp>
       <p:sp>
         <p:nvSpPr>
-          <p:cNvPr id="25" name="Slide Number Placeholder 0"/>
+          <p:cNvPr id="62" name="Slide Number Placeholder 0"/>
           <p:cNvSpPr>
             <a:spLocks noGrp="1"/>
           </p:cNvSpPr>
